--- a/Lectures/Slides/SE-Deck-Template.pptx
+++ b/Lectures/Slides/SE-Deck-Template.pptx
@@ -61,7 +61,7 @@
         <a:solidFill>
           <a:srgbClr val="000000"/>
         </a:solidFill>
-        <a:latin typeface="Arial"/>
+        <a:latin typeface="Atkinson Hyperlegible Next"/>
         <a:ea typeface="Arial"/>
         <a:cs typeface="Arial"/>
         <a:sym typeface="Arial"/>
@@ -85,7 +85,7 @@
         <a:solidFill>
           <a:srgbClr val="000000"/>
         </a:solidFill>
-        <a:latin typeface="Arial"/>
+        <a:latin typeface="Atkinson Hyperlegible Next"/>
         <a:ea typeface="Arial"/>
         <a:cs typeface="Arial"/>
         <a:sym typeface="Arial"/>
@@ -109,7 +109,7 @@
         <a:solidFill>
           <a:srgbClr val="000000"/>
         </a:solidFill>
-        <a:latin typeface="Arial"/>
+        <a:latin typeface="Atkinson Hyperlegible Next"/>
         <a:ea typeface="Arial"/>
         <a:cs typeface="Arial"/>
         <a:sym typeface="Arial"/>
@@ -133,7 +133,7 @@
         <a:solidFill>
           <a:srgbClr val="000000"/>
         </a:solidFill>
-        <a:latin typeface="Arial"/>
+        <a:latin typeface="Atkinson Hyperlegible Next"/>
         <a:ea typeface="Arial"/>
         <a:cs typeface="Arial"/>
         <a:sym typeface="Arial"/>
@@ -157,7 +157,7 @@
         <a:solidFill>
           <a:srgbClr val="000000"/>
         </a:solidFill>
-        <a:latin typeface="Arial"/>
+        <a:latin typeface="Atkinson Hyperlegible Next"/>
         <a:ea typeface="Arial"/>
         <a:cs typeface="Arial"/>
         <a:sym typeface="Arial"/>
@@ -181,7 +181,7 @@
         <a:solidFill>
           <a:srgbClr val="000000"/>
         </a:solidFill>
-        <a:latin typeface="Arial"/>
+        <a:latin typeface="Atkinson Hyperlegible Next"/>
         <a:ea typeface="Arial"/>
         <a:cs typeface="Arial"/>
         <a:sym typeface="Arial"/>
@@ -205,7 +205,7 @@
         <a:solidFill>
           <a:srgbClr val="000000"/>
         </a:solidFill>
-        <a:latin typeface="Arial"/>
+        <a:latin typeface="Atkinson Hyperlegible Next"/>
         <a:ea typeface="Arial"/>
         <a:cs typeface="Arial"/>
         <a:sym typeface="Arial"/>
@@ -229,7 +229,7 @@
         <a:solidFill>
           <a:srgbClr val="000000"/>
         </a:solidFill>
-        <a:latin typeface="Arial"/>
+        <a:latin typeface="Atkinson Hyperlegible Next"/>
         <a:ea typeface="Arial"/>
         <a:cs typeface="Arial"/>
         <a:sym typeface="Arial"/>
@@ -253,7 +253,7 @@
         <a:solidFill>
           <a:srgbClr val="000000"/>
         </a:solidFill>
-        <a:latin typeface="Arial"/>
+        <a:latin typeface="Atkinson Hyperlegible Next"/>
         <a:ea typeface="Arial"/>
         <a:cs typeface="Arial"/>
         <a:sym typeface="Arial"/>
@@ -344,7 +344,7 @@
                 <a:solidFill>
                   <a:schemeClr val="dk1"/>
                 </a:solidFill>
-                <a:latin typeface="Calibri"/>
+                <a:latin typeface="Atkinson Hyperlegible Next"/>
                 <a:ea typeface="Calibri"/>
                 <a:cs typeface="Calibri"/>
                 <a:sym typeface="Calibri"/>
@@ -370,7 +370,7 @@
                 <a:solidFill>
                   <a:schemeClr val="dk1"/>
                 </a:solidFill>
-                <a:latin typeface="Calibri"/>
+                <a:latin typeface="Atkinson Hyperlegible Next"/>
                 <a:ea typeface="Calibri"/>
                 <a:cs typeface="Calibri"/>
                 <a:sym typeface="Calibri"/>
@@ -396,7 +396,7 @@
                 <a:solidFill>
                   <a:schemeClr val="dk1"/>
                 </a:solidFill>
-                <a:latin typeface="Calibri"/>
+                <a:latin typeface="Atkinson Hyperlegible Next"/>
                 <a:ea typeface="Calibri"/>
                 <a:cs typeface="Calibri"/>
                 <a:sym typeface="Calibri"/>
@@ -422,7 +422,7 @@
                 <a:solidFill>
                   <a:schemeClr val="dk1"/>
                 </a:solidFill>
-                <a:latin typeface="Calibri"/>
+                <a:latin typeface="Atkinson Hyperlegible Next"/>
                 <a:ea typeface="Calibri"/>
                 <a:cs typeface="Calibri"/>
                 <a:sym typeface="Calibri"/>
@@ -448,7 +448,7 @@
                 <a:solidFill>
                   <a:schemeClr val="dk1"/>
                 </a:solidFill>
-                <a:latin typeface="Calibri"/>
+                <a:latin typeface="Atkinson Hyperlegible Next"/>
                 <a:ea typeface="Calibri"/>
                 <a:cs typeface="Calibri"/>
                 <a:sym typeface="Calibri"/>
@@ -474,7 +474,7 @@
                 <a:solidFill>
                   <a:schemeClr val="dk1"/>
                 </a:solidFill>
-                <a:latin typeface="Calibri"/>
+                <a:latin typeface="Atkinson Hyperlegible Next"/>
                 <a:ea typeface="Calibri"/>
                 <a:cs typeface="Calibri"/>
                 <a:sym typeface="Calibri"/>
@@ -500,7 +500,7 @@
                 <a:solidFill>
                   <a:schemeClr val="dk1"/>
                 </a:solidFill>
-                <a:latin typeface="Calibri"/>
+                <a:latin typeface="Atkinson Hyperlegible Next"/>
                 <a:ea typeface="Calibri"/>
                 <a:cs typeface="Calibri"/>
                 <a:sym typeface="Calibri"/>
@@ -526,7 +526,7 @@
                 <a:solidFill>
                   <a:schemeClr val="dk1"/>
                 </a:solidFill>
-                <a:latin typeface="Calibri"/>
+                <a:latin typeface="Atkinson Hyperlegible Next"/>
                 <a:ea typeface="Calibri"/>
                 <a:cs typeface="Calibri"/>
                 <a:sym typeface="Calibri"/>
@@ -552,7 +552,7 @@
                 <a:solidFill>
                   <a:schemeClr val="dk1"/>
                 </a:solidFill>
-                <a:latin typeface="Calibri"/>
+                <a:latin typeface="Atkinson Hyperlegible Next"/>
                 <a:ea typeface="Calibri"/>
                 <a:cs typeface="Calibri"/>
                 <a:sym typeface="Calibri"/>
@@ -612,7 +612,7 @@
                 <a:solidFill>
                   <a:schemeClr val="dk1"/>
                 </a:solidFill>
-                <a:latin typeface="Calibri"/>
+                <a:latin typeface="Atkinson Hyperlegible Next"/>
                 <a:ea typeface="Calibri"/>
                 <a:cs typeface="Calibri"/>
                 <a:sym typeface="Calibri"/>
@@ -638,7 +638,7 @@
                 <a:solidFill>
                   <a:schemeClr val="dk1"/>
                 </a:solidFill>
-                <a:latin typeface="Calibri"/>
+                <a:latin typeface="Atkinson Hyperlegible Next"/>
                 <a:ea typeface="Calibri"/>
                 <a:cs typeface="Calibri"/>
                 <a:sym typeface="Calibri"/>
@@ -664,7 +664,7 @@
                 <a:solidFill>
                   <a:schemeClr val="dk1"/>
                 </a:solidFill>
-                <a:latin typeface="Calibri"/>
+                <a:latin typeface="Atkinson Hyperlegible Next"/>
                 <a:ea typeface="Calibri"/>
                 <a:cs typeface="Calibri"/>
                 <a:sym typeface="Calibri"/>
@@ -690,7 +690,7 @@
                 <a:solidFill>
                   <a:schemeClr val="dk1"/>
                 </a:solidFill>
-                <a:latin typeface="Calibri"/>
+                <a:latin typeface="Atkinson Hyperlegible Next"/>
                 <a:ea typeface="Calibri"/>
                 <a:cs typeface="Calibri"/>
                 <a:sym typeface="Calibri"/>
@@ -716,7 +716,7 @@
                 <a:solidFill>
                   <a:schemeClr val="dk1"/>
                 </a:solidFill>
-                <a:latin typeface="Calibri"/>
+                <a:latin typeface="Atkinson Hyperlegible Next"/>
                 <a:ea typeface="Calibri"/>
                 <a:cs typeface="Calibri"/>
                 <a:sym typeface="Calibri"/>
@@ -742,7 +742,7 @@
                 <a:solidFill>
                   <a:schemeClr val="dk1"/>
                 </a:solidFill>
-                <a:latin typeface="Calibri"/>
+                <a:latin typeface="Atkinson Hyperlegible Next"/>
                 <a:ea typeface="Calibri"/>
                 <a:cs typeface="Calibri"/>
                 <a:sym typeface="Calibri"/>
@@ -768,7 +768,7 @@
                 <a:solidFill>
                   <a:schemeClr val="dk1"/>
                 </a:solidFill>
-                <a:latin typeface="Calibri"/>
+                <a:latin typeface="Atkinson Hyperlegible Next"/>
                 <a:ea typeface="Calibri"/>
                 <a:cs typeface="Calibri"/>
                 <a:sym typeface="Calibri"/>
@@ -794,7 +794,7 @@
                 <a:solidFill>
                   <a:schemeClr val="dk1"/>
                 </a:solidFill>
-                <a:latin typeface="Calibri"/>
+                <a:latin typeface="Atkinson Hyperlegible Next"/>
                 <a:ea typeface="Calibri"/>
                 <a:cs typeface="Calibri"/>
                 <a:sym typeface="Calibri"/>
@@ -820,7 +820,7 @@
                 <a:solidFill>
                   <a:schemeClr val="dk1"/>
                 </a:solidFill>
-                <a:latin typeface="Calibri"/>
+                <a:latin typeface="Atkinson Hyperlegible Next"/>
                 <a:ea typeface="Calibri"/>
                 <a:cs typeface="Calibri"/>
                 <a:sym typeface="Calibri"/>
@@ -931,7 +931,7 @@
                 <a:solidFill>
                   <a:schemeClr val="dk1"/>
                 </a:solidFill>
-                <a:latin typeface="Calibri"/>
+                <a:latin typeface="Atkinson Hyperlegible Next"/>
                 <a:ea typeface="Calibri"/>
                 <a:cs typeface="Calibri"/>
                 <a:sym typeface="Calibri"/>
@@ -957,7 +957,7 @@
                 <a:solidFill>
                   <a:schemeClr val="dk1"/>
                 </a:solidFill>
-                <a:latin typeface="Calibri"/>
+                <a:latin typeface="Atkinson Hyperlegible Next"/>
                 <a:ea typeface="Calibri"/>
                 <a:cs typeface="Calibri"/>
                 <a:sym typeface="Calibri"/>
@@ -983,7 +983,7 @@
                 <a:solidFill>
                   <a:schemeClr val="dk1"/>
                 </a:solidFill>
-                <a:latin typeface="Calibri"/>
+                <a:latin typeface="Atkinson Hyperlegible Next"/>
                 <a:ea typeface="Calibri"/>
                 <a:cs typeface="Calibri"/>
                 <a:sym typeface="Calibri"/>
@@ -1009,7 +1009,7 @@
                 <a:solidFill>
                   <a:schemeClr val="dk1"/>
                 </a:solidFill>
-                <a:latin typeface="Calibri"/>
+                <a:latin typeface="Atkinson Hyperlegible Next"/>
                 <a:ea typeface="Calibri"/>
                 <a:cs typeface="Calibri"/>
                 <a:sym typeface="Calibri"/>
@@ -1035,7 +1035,7 @@
                 <a:solidFill>
                   <a:schemeClr val="dk1"/>
                 </a:solidFill>
-                <a:latin typeface="Calibri"/>
+                <a:latin typeface="Atkinson Hyperlegible Next"/>
                 <a:ea typeface="Calibri"/>
                 <a:cs typeface="Calibri"/>
                 <a:sym typeface="Calibri"/>
@@ -1061,7 +1061,7 @@
                 <a:solidFill>
                   <a:schemeClr val="dk1"/>
                 </a:solidFill>
-                <a:latin typeface="Calibri"/>
+                <a:latin typeface="Atkinson Hyperlegible Next"/>
                 <a:ea typeface="Calibri"/>
                 <a:cs typeface="Calibri"/>
                 <a:sym typeface="Calibri"/>
@@ -1087,7 +1087,7 @@
                 <a:solidFill>
                   <a:schemeClr val="dk1"/>
                 </a:solidFill>
-                <a:latin typeface="Calibri"/>
+                <a:latin typeface="Atkinson Hyperlegible Next"/>
                 <a:ea typeface="Calibri"/>
                 <a:cs typeface="Calibri"/>
                 <a:sym typeface="Calibri"/>
@@ -1113,7 +1113,7 @@
                 <a:solidFill>
                   <a:schemeClr val="dk1"/>
                 </a:solidFill>
-                <a:latin typeface="Calibri"/>
+                <a:latin typeface="Atkinson Hyperlegible Next"/>
                 <a:ea typeface="Calibri"/>
                 <a:cs typeface="Calibri"/>
                 <a:sym typeface="Calibri"/>
@@ -1139,7 +1139,7 @@
                 <a:solidFill>
                   <a:schemeClr val="dk1"/>
                 </a:solidFill>
-                <a:latin typeface="Calibri"/>
+                <a:latin typeface="Atkinson Hyperlegible Next"/>
                 <a:ea typeface="Calibri"/>
                 <a:cs typeface="Calibri"/>
                 <a:sym typeface="Calibri"/>
@@ -1199,7 +1199,7 @@
                 <a:solidFill>
                   <a:schemeClr val="dk1"/>
                 </a:solidFill>
-                <a:latin typeface="Calibri"/>
+                <a:latin typeface="Atkinson Hyperlegible Next"/>
                 <a:ea typeface="Calibri"/>
                 <a:cs typeface="Calibri"/>
                 <a:sym typeface="Calibri"/>
@@ -1225,7 +1225,7 @@
                 <a:solidFill>
                   <a:schemeClr val="dk1"/>
                 </a:solidFill>
-                <a:latin typeface="Calibri"/>
+                <a:latin typeface="Atkinson Hyperlegible Next"/>
                 <a:ea typeface="Calibri"/>
                 <a:cs typeface="Calibri"/>
                 <a:sym typeface="Calibri"/>
@@ -1251,7 +1251,7 @@
                 <a:solidFill>
                   <a:schemeClr val="dk1"/>
                 </a:solidFill>
-                <a:latin typeface="Calibri"/>
+                <a:latin typeface="Atkinson Hyperlegible Next"/>
                 <a:ea typeface="Calibri"/>
                 <a:cs typeface="Calibri"/>
                 <a:sym typeface="Calibri"/>
@@ -1277,7 +1277,7 @@
                 <a:solidFill>
                   <a:schemeClr val="dk1"/>
                 </a:solidFill>
-                <a:latin typeface="Calibri"/>
+                <a:latin typeface="Atkinson Hyperlegible Next"/>
                 <a:ea typeface="Calibri"/>
                 <a:cs typeface="Calibri"/>
                 <a:sym typeface="Calibri"/>
@@ -1303,7 +1303,7 @@
                 <a:solidFill>
                   <a:schemeClr val="dk1"/>
                 </a:solidFill>
-                <a:latin typeface="Calibri"/>
+                <a:latin typeface="Atkinson Hyperlegible Next"/>
                 <a:ea typeface="Calibri"/>
                 <a:cs typeface="Calibri"/>
                 <a:sym typeface="Calibri"/>
@@ -1329,7 +1329,7 @@
                 <a:solidFill>
                   <a:schemeClr val="dk1"/>
                 </a:solidFill>
-                <a:latin typeface="Calibri"/>
+                <a:latin typeface="Atkinson Hyperlegible Next"/>
                 <a:ea typeface="Calibri"/>
                 <a:cs typeface="Calibri"/>
                 <a:sym typeface="Calibri"/>
@@ -1355,7 +1355,7 @@
                 <a:solidFill>
                   <a:schemeClr val="dk1"/>
                 </a:solidFill>
-                <a:latin typeface="Calibri"/>
+                <a:latin typeface="Atkinson Hyperlegible Next"/>
                 <a:ea typeface="Calibri"/>
                 <a:cs typeface="Calibri"/>
                 <a:sym typeface="Calibri"/>
@@ -1381,7 +1381,7 @@
                 <a:solidFill>
                   <a:schemeClr val="dk1"/>
                 </a:solidFill>
-                <a:latin typeface="Calibri"/>
+                <a:latin typeface="Atkinson Hyperlegible Next"/>
                 <a:ea typeface="Calibri"/>
                 <a:cs typeface="Calibri"/>
                 <a:sym typeface="Calibri"/>
@@ -1407,7 +1407,7 @@
                 <a:solidFill>
                   <a:schemeClr val="dk1"/>
                 </a:solidFill>
-                <a:latin typeface="Calibri"/>
+                <a:latin typeface="Atkinson Hyperlegible Next"/>
                 <a:ea typeface="Calibri"/>
                 <a:cs typeface="Calibri"/>
                 <a:sym typeface="Calibri"/>
@@ -1470,7 +1470,7 @@
                 <a:solidFill>
                   <a:schemeClr val="dk1"/>
                 </a:solidFill>
-                <a:latin typeface="Calibri"/>
+                <a:latin typeface="Atkinson Hyperlegible Next"/>
                 <a:ea typeface="Calibri"/>
                 <a:cs typeface="Calibri"/>
                 <a:sym typeface="Calibri"/>
@@ -1481,7 +1481,7 @@
               <a:solidFill>
                 <a:schemeClr val="dk1"/>
               </a:solidFill>
-              <a:latin typeface="Calibri"/>
+              <a:latin typeface="Atkinson Hyperlegible Next"/>
               <a:ea typeface="Calibri"/>
               <a:cs typeface="Calibri"/>
               <a:sym typeface="Calibri"/>
@@ -1522,7 +1522,7 @@
         <a:solidFill>
           <a:srgbClr val="000000"/>
         </a:solidFill>
-        <a:latin typeface="Arial"/>
+        <a:latin typeface="Atkinson Hyperlegible Next"/>
         <a:ea typeface="Arial"/>
         <a:cs typeface="Arial"/>
         <a:sym typeface="Arial"/>
@@ -1546,7 +1546,7 @@
         <a:solidFill>
           <a:srgbClr val="000000"/>
         </a:solidFill>
-        <a:latin typeface="Arial"/>
+        <a:latin typeface="Atkinson Hyperlegible Next"/>
         <a:ea typeface="Arial"/>
         <a:cs typeface="Arial"/>
         <a:sym typeface="Arial"/>
@@ -1570,7 +1570,7 @@
         <a:solidFill>
           <a:srgbClr val="000000"/>
         </a:solidFill>
-        <a:latin typeface="Arial"/>
+        <a:latin typeface="Atkinson Hyperlegible Next"/>
         <a:ea typeface="Arial"/>
         <a:cs typeface="Arial"/>
         <a:sym typeface="Arial"/>
@@ -1594,7 +1594,7 @@
         <a:solidFill>
           <a:srgbClr val="000000"/>
         </a:solidFill>
-        <a:latin typeface="Arial"/>
+        <a:latin typeface="Atkinson Hyperlegible Next"/>
         <a:ea typeface="Arial"/>
         <a:cs typeface="Arial"/>
         <a:sym typeface="Arial"/>
@@ -1618,7 +1618,7 @@
         <a:solidFill>
           <a:srgbClr val="000000"/>
         </a:solidFill>
-        <a:latin typeface="Arial"/>
+        <a:latin typeface="Atkinson Hyperlegible Next"/>
         <a:ea typeface="Arial"/>
         <a:cs typeface="Arial"/>
         <a:sym typeface="Arial"/>
@@ -1642,7 +1642,7 @@
         <a:solidFill>
           <a:srgbClr val="000000"/>
         </a:solidFill>
-        <a:latin typeface="Arial"/>
+        <a:latin typeface="Atkinson Hyperlegible Next"/>
         <a:ea typeface="Arial"/>
         <a:cs typeface="Arial"/>
         <a:sym typeface="Arial"/>
@@ -1666,7 +1666,7 @@
         <a:solidFill>
           <a:srgbClr val="000000"/>
         </a:solidFill>
-        <a:latin typeface="Arial"/>
+        <a:latin typeface="Atkinson Hyperlegible Next"/>
         <a:ea typeface="Arial"/>
         <a:cs typeface="Arial"/>
         <a:sym typeface="Arial"/>
@@ -1690,7 +1690,7 @@
         <a:solidFill>
           <a:srgbClr val="000000"/>
         </a:solidFill>
-        <a:latin typeface="Arial"/>
+        <a:latin typeface="Atkinson Hyperlegible Next"/>
         <a:ea typeface="Arial"/>
         <a:cs typeface="Arial"/>
         <a:sym typeface="Arial"/>
@@ -1714,7 +1714,7 @@
         <a:solidFill>
           <a:srgbClr val="000000"/>
         </a:solidFill>
-        <a:latin typeface="Arial"/>
+        <a:latin typeface="Atkinson Hyperlegible Next"/>
         <a:ea typeface="Arial"/>
         <a:cs typeface="Arial"/>
         <a:sym typeface="Arial"/>
@@ -4412,7 +4412,7 @@
                 <a:solidFill>
                   <a:srgbClr val="888888"/>
                 </a:solidFill>
-                <a:latin typeface="Calibri"/>
+                <a:latin typeface="Atkinson Hyperlegible Next"/>
                 <a:ea typeface="Calibri"/>
                 <a:cs typeface="Calibri"/>
                 <a:sym typeface="Calibri"/>
@@ -4438,7 +4438,7 @@
                 <a:solidFill>
                   <a:srgbClr val="888888"/>
                 </a:solidFill>
-                <a:latin typeface="Calibri"/>
+                <a:latin typeface="Atkinson Hyperlegible Next"/>
                 <a:ea typeface="Calibri"/>
                 <a:cs typeface="Calibri"/>
                 <a:sym typeface="Calibri"/>
@@ -4464,7 +4464,7 @@
                 <a:solidFill>
                   <a:srgbClr val="888888"/>
                 </a:solidFill>
-                <a:latin typeface="Calibri"/>
+                <a:latin typeface="Atkinson Hyperlegible Next"/>
                 <a:ea typeface="Calibri"/>
                 <a:cs typeface="Calibri"/>
                 <a:sym typeface="Calibri"/>
@@ -4490,7 +4490,7 @@
                 <a:solidFill>
                   <a:srgbClr val="888888"/>
                 </a:solidFill>
-                <a:latin typeface="Calibri"/>
+                <a:latin typeface="Atkinson Hyperlegible Next"/>
                 <a:ea typeface="Calibri"/>
                 <a:cs typeface="Calibri"/>
                 <a:sym typeface="Calibri"/>
@@ -4516,7 +4516,7 @@
                 <a:solidFill>
                   <a:srgbClr val="888888"/>
                 </a:solidFill>
-                <a:latin typeface="Calibri"/>
+                <a:latin typeface="Atkinson Hyperlegible Next"/>
                 <a:ea typeface="Calibri"/>
                 <a:cs typeface="Calibri"/>
                 <a:sym typeface="Calibri"/>
@@ -4542,7 +4542,7 @@
                 <a:solidFill>
                   <a:srgbClr val="888888"/>
                 </a:solidFill>
-                <a:latin typeface="Calibri"/>
+                <a:latin typeface="Atkinson Hyperlegible Next"/>
                 <a:ea typeface="Calibri"/>
                 <a:cs typeface="Calibri"/>
                 <a:sym typeface="Calibri"/>
@@ -4568,7 +4568,7 @@
                 <a:solidFill>
                   <a:srgbClr val="888888"/>
                 </a:solidFill>
-                <a:latin typeface="Calibri"/>
+                <a:latin typeface="Atkinson Hyperlegible Next"/>
                 <a:ea typeface="Calibri"/>
                 <a:cs typeface="Calibri"/>
                 <a:sym typeface="Calibri"/>
@@ -4594,7 +4594,7 @@
                 <a:solidFill>
                   <a:srgbClr val="888888"/>
                 </a:solidFill>
-                <a:latin typeface="Calibri"/>
+                <a:latin typeface="Atkinson Hyperlegible Next"/>
                 <a:ea typeface="Calibri"/>
                 <a:cs typeface="Calibri"/>
                 <a:sym typeface="Calibri"/>
@@ -4620,7 +4620,7 @@
                 <a:solidFill>
                   <a:srgbClr val="888888"/>
                 </a:solidFill>
-                <a:latin typeface="Calibri"/>
+                <a:latin typeface="Atkinson Hyperlegible Next"/>
                 <a:ea typeface="Calibri"/>
                 <a:cs typeface="Calibri"/>
                 <a:sym typeface="Calibri"/>
@@ -5388,7 +5388,7 @@
                 <a:solidFill>
                   <a:srgbClr val="888888"/>
                 </a:solidFill>
-                <a:latin typeface="Calibri"/>
+                <a:latin typeface="Atkinson Hyperlegible Next"/>
                 <a:ea typeface="Calibri"/>
                 <a:cs typeface="Calibri"/>
                 <a:sym typeface="Calibri"/>
@@ -5414,7 +5414,7 @@
                 <a:solidFill>
                   <a:srgbClr val="888888"/>
                 </a:solidFill>
-                <a:latin typeface="Calibri"/>
+                <a:latin typeface="Atkinson Hyperlegible Next"/>
                 <a:ea typeface="Calibri"/>
                 <a:cs typeface="Calibri"/>
                 <a:sym typeface="Calibri"/>
@@ -5440,7 +5440,7 @@
                 <a:solidFill>
                   <a:srgbClr val="888888"/>
                 </a:solidFill>
-                <a:latin typeface="Calibri"/>
+                <a:latin typeface="Atkinson Hyperlegible Next"/>
                 <a:ea typeface="Calibri"/>
                 <a:cs typeface="Calibri"/>
                 <a:sym typeface="Calibri"/>
@@ -5466,7 +5466,7 @@
                 <a:solidFill>
                   <a:srgbClr val="888888"/>
                 </a:solidFill>
-                <a:latin typeface="Calibri"/>
+                <a:latin typeface="Atkinson Hyperlegible Next"/>
                 <a:ea typeface="Calibri"/>
                 <a:cs typeface="Calibri"/>
                 <a:sym typeface="Calibri"/>
@@ -5492,7 +5492,7 @@
                 <a:solidFill>
                   <a:srgbClr val="888888"/>
                 </a:solidFill>
-                <a:latin typeface="Calibri"/>
+                <a:latin typeface="Atkinson Hyperlegible Next"/>
                 <a:ea typeface="Calibri"/>
                 <a:cs typeface="Calibri"/>
                 <a:sym typeface="Calibri"/>
@@ -5518,7 +5518,7 @@
                 <a:solidFill>
                   <a:srgbClr val="888888"/>
                 </a:solidFill>
-                <a:latin typeface="Calibri"/>
+                <a:latin typeface="Atkinson Hyperlegible Next"/>
                 <a:ea typeface="Calibri"/>
                 <a:cs typeface="Calibri"/>
                 <a:sym typeface="Calibri"/>
@@ -5544,7 +5544,7 @@
                 <a:solidFill>
                   <a:srgbClr val="888888"/>
                 </a:solidFill>
-                <a:latin typeface="Calibri"/>
+                <a:latin typeface="Atkinson Hyperlegible Next"/>
                 <a:ea typeface="Calibri"/>
                 <a:cs typeface="Calibri"/>
                 <a:sym typeface="Calibri"/>
@@ -5570,7 +5570,7 @@
                 <a:solidFill>
                   <a:srgbClr val="888888"/>
                 </a:solidFill>
-                <a:latin typeface="Calibri"/>
+                <a:latin typeface="Atkinson Hyperlegible Next"/>
                 <a:ea typeface="Calibri"/>
                 <a:cs typeface="Calibri"/>
                 <a:sym typeface="Calibri"/>
@@ -5596,7 +5596,7 @@
                 <a:solidFill>
                   <a:srgbClr val="888888"/>
                 </a:solidFill>
-                <a:latin typeface="Calibri"/>
+                <a:latin typeface="Atkinson Hyperlegible Next"/>
                 <a:ea typeface="Calibri"/>
                 <a:cs typeface="Calibri"/>
                 <a:sym typeface="Calibri"/>
@@ -6364,7 +6364,7 @@
                 <a:solidFill>
                   <a:srgbClr val="888888"/>
                 </a:solidFill>
-                <a:latin typeface="Calibri"/>
+                <a:latin typeface="Atkinson Hyperlegible Next"/>
                 <a:ea typeface="Calibri"/>
                 <a:cs typeface="Calibri"/>
                 <a:sym typeface="Calibri"/>
@@ -6390,7 +6390,7 @@
                 <a:solidFill>
                   <a:srgbClr val="888888"/>
                 </a:solidFill>
-                <a:latin typeface="Calibri"/>
+                <a:latin typeface="Atkinson Hyperlegible Next"/>
                 <a:ea typeface="Calibri"/>
                 <a:cs typeface="Calibri"/>
                 <a:sym typeface="Calibri"/>
@@ -6416,7 +6416,7 @@
                 <a:solidFill>
                   <a:srgbClr val="888888"/>
                 </a:solidFill>
-                <a:latin typeface="Calibri"/>
+                <a:latin typeface="Atkinson Hyperlegible Next"/>
                 <a:ea typeface="Calibri"/>
                 <a:cs typeface="Calibri"/>
                 <a:sym typeface="Calibri"/>
@@ -6442,7 +6442,7 @@
                 <a:solidFill>
                   <a:srgbClr val="888888"/>
                 </a:solidFill>
-                <a:latin typeface="Calibri"/>
+                <a:latin typeface="Atkinson Hyperlegible Next"/>
                 <a:ea typeface="Calibri"/>
                 <a:cs typeface="Calibri"/>
                 <a:sym typeface="Calibri"/>
@@ -6468,7 +6468,7 @@
                 <a:solidFill>
                   <a:srgbClr val="888888"/>
                 </a:solidFill>
-                <a:latin typeface="Calibri"/>
+                <a:latin typeface="Atkinson Hyperlegible Next"/>
                 <a:ea typeface="Calibri"/>
                 <a:cs typeface="Calibri"/>
                 <a:sym typeface="Calibri"/>
@@ -6494,7 +6494,7 @@
                 <a:solidFill>
                   <a:srgbClr val="888888"/>
                 </a:solidFill>
-                <a:latin typeface="Calibri"/>
+                <a:latin typeface="Atkinson Hyperlegible Next"/>
                 <a:ea typeface="Calibri"/>
                 <a:cs typeface="Calibri"/>
                 <a:sym typeface="Calibri"/>
@@ -6520,7 +6520,7 @@
                 <a:solidFill>
                   <a:srgbClr val="888888"/>
                 </a:solidFill>
-                <a:latin typeface="Calibri"/>
+                <a:latin typeface="Atkinson Hyperlegible Next"/>
                 <a:ea typeface="Calibri"/>
                 <a:cs typeface="Calibri"/>
                 <a:sym typeface="Calibri"/>
@@ -6546,7 +6546,7 @@
                 <a:solidFill>
                   <a:srgbClr val="888888"/>
                 </a:solidFill>
-                <a:latin typeface="Calibri"/>
+                <a:latin typeface="Atkinson Hyperlegible Next"/>
                 <a:ea typeface="Calibri"/>
                 <a:cs typeface="Calibri"/>
                 <a:sym typeface="Calibri"/>
@@ -6572,7 +6572,7 @@
                 <a:solidFill>
                   <a:srgbClr val="888888"/>
                 </a:solidFill>
-                <a:latin typeface="Calibri"/>
+                <a:latin typeface="Atkinson Hyperlegible Next"/>
                 <a:ea typeface="Calibri"/>
                 <a:cs typeface="Calibri"/>
                 <a:sym typeface="Calibri"/>
@@ -7377,7 +7377,7 @@
                 <a:solidFill>
                   <a:srgbClr val="888888"/>
                 </a:solidFill>
-                <a:latin typeface="Calibri"/>
+                <a:latin typeface="Atkinson Hyperlegible Next"/>
                 <a:ea typeface="Calibri"/>
                 <a:cs typeface="Calibri"/>
                 <a:sym typeface="Calibri"/>
@@ -7403,7 +7403,7 @@
                 <a:solidFill>
                   <a:srgbClr val="888888"/>
                 </a:solidFill>
-                <a:latin typeface="Calibri"/>
+                <a:latin typeface="Atkinson Hyperlegible Next"/>
                 <a:ea typeface="Calibri"/>
                 <a:cs typeface="Calibri"/>
                 <a:sym typeface="Calibri"/>
@@ -7429,7 +7429,7 @@
                 <a:solidFill>
                   <a:srgbClr val="888888"/>
                 </a:solidFill>
-                <a:latin typeface="Calibri"/>
+                <a:latin typeface="Atkinson Hyperlegible Next"/>
                 <a:ea typeface="Calibri"/>
                 <a:cs typeface="Calibri"/>
                 <a:sym typeface="Calibri"/>
@@ -7455,7 +7455,7 @@
                 <a:solidFill>
                   <a:srgbClr val="888888"/>
                 </a:solidFill>
-                <a:latin typeface="Calibri"/>
+                <a:latin typeface="Atkinson Hyperlegible Next"/>
                 <a:ea typeface="Calibri"/>
                 <a:cs typeface="Calibri"/>
                 <a:sym typeface="Calibri"/>
@@ -7481,7 +7481,7 @@
                 <a:solidFill>
                   <a:srgbClr val="888888"/>
                 </a:solidFill>
-                <a:latin typeface="Calibri"/>
+                <a:latin typeface="Atkinson Hyperlegible Next"/>
                 <a:ea typeface="Calibri"/>
                 <a:cs typeface="Calibri"/>
                 <a:sym typeface="Calibri"/>
@@ -7507,7 +7507,7 @@
                 <a:solidFill>
                   <a:srgbClr val="888888"/>
                 </a:solidFill>
-                <a:latin typeface="Calibri"/>
+                <a:latin typeface="Atkinson Hyperlegible Next"/>
                 <a:ea typeface="Calibri"/>
                 <a:cs typeface="Calibri"/>
                 <a:sym typeface="Calibri"/>
@@ -7533,7 +7533,7 @@
                 <a:solidFill>
                   <a:srgbClr val="888888"/>
                 </a:solidFill>
-                <a:latin typeface="Calibri"/>
+                <a:latin typeface="Atkinson Hyperlegible Next"/>
                 <a:ea typeface="Calibri"/>
                 <a:cs typeface="Calibri"/>
                 <a:sym typeface="Calibri"/>
@@ -7559,7 +7559,7 @@
                 <a:solidFill>
                   <a:srgbClr val="888888"/>
                 </a:solidFill>
-                <a:latin typeface="Calibri"/>
+                <a:latin typeface="Atkinson Hyperlegible Next"/>
                 <a:ea typeface="Calibri"/>
                 <a:cs typeface="Calibri"/>
                 <a:sym typeface="Calibri"/>
@@ -7585,7 +7585,7 @@
                 <a:solidFill>
                   <a:srgbClr val="888888"/>
                 </a:solidFill>
-                <a:latin typeface="Calibri"/>
+                <a:latin typeface="Atkinson Hyperlegible Next"/>
                 <a:ea typeface="Calibri"/>
                 <a:cs typeface="Calibri"/>
                 <a:sym typeface="Calibri"/>
@@ -8540,7 +8540,7 @@
                 <a:solidFill>
                   <a:srgbClr val="888888"/>
                 </a:solidFill>
-                <a:latin typeface="Calibri"/>
+                <a:latin typeface="Atkinson Hyperlegible Next"/>
                 <a:ea typeface="Calibri"/>
                 <a:cs typeface="Calibri"/>
                 <a:sym typeface="Calibri"/>
@@ -8566,7 +8566,7 @@
                 <a:solidFill>
                   <a:srgbClr val="888888"/>
                 </a:solidFill>
-                <a:latin typeface="Calibri"/>
+                <a:latin typeface="Atkinson Hyperlegible Next"/>
                 <a:ea typeface="Calibri"/>
                 <a:cs typeface="Calibri"/>
                 <a:sym typeface="Calibri"/>
@@ -8592,7 +8592,7 @@
                 <a:solidFill>
                   <a:srgbClr val="888888"/>
                 </a:solidFill>
-                <a:latin typeface="Calibri"/>
+                <a:latin typeface="Atkinson Hyperlegible Next"/>
                 <a:ea typeface="Calibri"/>
                 <a:cs typeface="Calibri"/>
                 <a:sym typeface="Calibri"/>
@@ -8618,7 +8618,7 @@
                 <a:solidFill>
                   <a:srgbClr val="888888"/>
                 </a:solidFill>
-                <a:latin typeface="Calibri"/>
+                <a:latin typeface="Atkinson Hyperlegible Next"/>
                 <a:ea typeface="Calibri"/>
                 <a:cs typeface="Calibri"/>
                 <a:sym typeface="Calibri"/>
@@ -8644,7 +8644,7 @@
                 <a:solidFill>
                   <a:srgbClr val="888888"/>
                 </a:solidFill>
-                <a:latin typeface="Calibri"/>
+                <a:latin typeface="Atkinson Hyperlegible Next"/>
                 <a:ea typeface="Calibri"/>
                 <a:cs typeface="Calibri"/>
                 <a:sym typeface="Calibri"/>
@@ -8670,7 +8670,7 @@
                 <a:solidFill>
                   <a:srgbClr val="888888"/>
                 </a:solidFill>
-                <a:latin typeface="Calibri"/>
+                <a:latin typeface="Atkinson Hyperlegible Next"/>
                 <a:ea typeface="Calibri"/>
                 <a:cs typeface="Calibri"/>
                 <a:sym typeface="Calibri"/>
@@ -8696,7 +8696,7 @@
                 <a:solidFill>
                   <a:srgbClr val="888888"/>
                 </a:solidFill>
-                <a:latin typeface="Calibri"/>
+                <a:latin typeface="Atkinson Hyperlegible Next"/>
                 <a:ea typeface="Calibri"/>
                 <a:cs typeface="Calibri"/>
                 <a:sym typeface="Calibri"/>
@@ -8722,7 +8722,7 @@
                 <a:solidFill>
                   <a:srgbClr val="888888"/>
                 </a:solidFill>
-                <a:latin typeface="Calibri"/>
+                <a:latin typeface="Atkinson Hyperlegible Next"/>
                 <a:ea typeface="Calibri"/>
                 <a:cs typeface="Calibri"/>
                 <a:sym typeface="Calibri"/>
@@ -8748,7 +8748,7 @@
                 <a:solidFill>
                   <a:srgbClr val="888888"/>
                 </a:solidFill>
-                <a:latin typeface="Calibri"/>
+                <a:latin typeface="Atkinson Hyperlegible Next"/>
                 <a:ea typeface="Calibri"/>
                 <a:cs typeface="Calibri"/>
                 <a:sym typeface="Calibri"/>
@@ -10077,7 +10077,7 @@
                 <a:solidFill>
                   <a:srgbClr val="888888"/>
                 </a:solidFill>
-                <a:latin typeface="Calibri"/>
+                <a:latin typeface="Atkinson Hyperlegible Next"/>
                 <a:ea typeface="Calibri"/>
                 <a:cs typeface="Calibri"/>
                 <a:sym typeface="Calibri"/>
@@ -10103,7 +10103,7 @@
                 <a:solidFill>
                   <a:srgbClr val="888888"/>
                 </a:solidFill>
-                <a:latin typeface="Calibri"/>
+                <a:latin typeface="Atkinson Hyperlegible Next"/>
                 <a:ea typeface="Calibri"/>
                 <a:cs typeface="Calibri"/>
                 <a:sym typeface="Calibri"/>
@@ -10129,7 +10129,7 @@
                 <a:solidFill>
                   <a:srgbClr val="888888"/>
                 </a:solidFill>
-                <a:latin typeface="Calibri"/>
+                <a:latin typeface="Atkinson Hyperlegible Next"/>
                 <a:ea typeface="Calibri"/>
                 <a:cs typeface="Calibri"/>
                 <a:sym typeface="Calibri"/>
@@ -10155,7 +10155,7 @@
                 <a:solidFill>
                   <a:srgbClr val="888888"/>
                 </a:solidFill>
-                <a:latin typeface="Calibri"/>
+                <a:latin typeface="Atkinson Hyperlegible Next"/>
                 <a:ea typeface="Calibri"/>
                 <a:cs typeface="Calibri"/>
                 <a:sym typeface="Calibri"/>
@@ -10181,7 +10181,7 @@
                 <a:solidFill>
                   <a:srgbClr val="888888"/>
                 </a:solidFill>
-                <a:latin typeface="Calibri"/>
+                <a:latin typeface="Atkinson Hyperlegible Next"/>
                 <a:ea typeface="Calibri"/>
                 <a:cs typeface="Calibri"/>
                 <a:sym typeface="Calibri"/>
@@ -10207,7 +10207,7 @@
                 <a:solidFill>
                   <a:srgbClr val="888888"/>
                 </a:solidFill>
-                <a:latin typeface="Calibri"/>
+                <a:latin typeface="Atkinson Hyperlegible Next"/>
                 <a:ea typeface="Calibri"/>
                 <a:cs typeface="Calibri"/>
                 <a:sym typeface="Calibri"/>
@@ -10233,7 +10233,7 @@
                 <a:solidFill>
                   <a:srgbClr val="888888"/>
                 </a:solidFill>
-                <a:latin typeface="Calibri"/>
+                <a:latin typeface="Atkinson Hyperlegible Next"/>
                 <a:ea typeface="Calibri"/>
                 <a:cs typeface="Calibri"/>
                 <a:sym typeface="Calibri"/>
@@ -10259,7 +10259,7 @@
                 <a:solidFill>
                   <a:srgbClr val="888888"/>
                 </a:solidFill>
-                <a:latin typeface="Calibri"/>
+                <a:latin typeface="Atkinson Hyperlegible Next"/>
                 <a:ea typeface="Calibri"/>
                 <a:cs typeface="Calibri"/>
                 <a:sym typeface="Calibri"/>
@@ -10285,7 +10285,7 @@
                 <a:solidFill>
                   <a:srgbClr val="888888"/>
                 </a:solidFill>
-                <a:latin typeface="Calibri"/>
+                <a:latin typeface="Atkinson Hyperlegible Next"/>
                 <a:ea typeface="Calibri"/>
                 <a:cs typeface="Calibri"/>
                 <a:sym typeface="Calibri"/>
@@ -10866,7 +10866,7 @@
                 <a:solidFill>
                   <a:srgbClr val="888888"/>
                 </a:solidFill>
-                <a:latin typeface="Calibri"/>
+                <a:latin typeface="Atkinson Hyperlegible Next"/>
                 <a:ea typeface="Calibri"/>
                 <a:cs typeface="Calibri"/>
                 <a:sym typeface="Calibri"/>
@@ -10892,7 +10892,7 @@
                 <a:solidFill>
                   <a:srgbClr val="888888"/>
                 </a:solidFill>
-                <a:latin typeface="Calibri"/>
+                <a:latin typeface="Atkinson Hyperlegible Next"/>
                 <a:ea typeface="Calibri"/>
                 <a:cs typeface="Calibri"/>
                 <a:sym typeface="Calibri"/>
@@ -10918,7 +10918,7 @@
                 <a:solidFill>
                   <a:srgbClr val="888888"/>
                 </a:solidFill>
-                <a:latin typeface="Calibri"/>
+                <a:latin typeface="Atkinson Hyperlegible Next"/>
                 <a:ea typeface="Calibri"/>
                 <a:cs typeface="Calibri"/>
                 <a:sym typeface="Calibri"/>
@@ -10944,7 +10944,7 @@
                 <a:solidFill>
                   <a:srgbClr val="888888"/>
                 </a:solidFill>
-                <a:latin typeface="Calibri"/>
+                <a:latin typeface="Atkinson Hyperlegible Next"/>
                 <a:ea typeface="Calibri"/>
                 <a:cs typeface="Calibri"/>
                 <a:sym typeface="Calibri"/>
@@ -10970,7 +10970,7 @@
                 <a:solidFill>
                   <a:srgbClr val="888888"/>
                 </a:solidFill>
-                <a:latin typeface="Calibri"/>
+                <a:latin typeface="Atkinson Hyperlegible Next"/>
                 <a:ea typeface="Calibri"/>
                 <a:cs typeface="Calibri"/>
                 <a:sym typeface="Calibri"/>
@@ -10996,7 +10996,7 @@
                 <a:solidFill>
                   <a:srgbClr val="888888"/>
                 </a:solidFill>
-                <a:latin typeface="Calibri"/>
+                <a:latin typeface="Atkinson Hyperlegible Next"/>
                 <a:ea typeface="Calibri"/>
                 <a:cs typeface="Calibri"/>
                 <a:sym typeface="Calibri"/>
@@ -11022,7 +11022,7 @@
                 <a:solidFill>
                   <a:srgbClr val="888888"/>
                 </a:solidFill>
-                <a:latin typeface="Calibri"/>
+                <a:latin typeface="Atkinson Hyperlegible Next"/>
                 <a:ea typeface="Calibri"/>
                 <a:cs typeface="Calibri"/>
                 <a:sym typeface="Calibri"/>
@@ -11048,7 +11048,7 @@
                 <a:solidFill>
                   <a:srgbClr val="888888"/>
                 </a:solidFill>
-                <a:latin typeface="Calibri"/>
+                <a:latin typeface="Atkinson Hyperlegible Next"/>
                 <a:ea typeface="Calibri"/>
                 <a:cs typeface="Calibri"/>
                 <a:sym typeface="Calibri"/>
@@ -11074,7 +11074,7 @@
                 <a:solidFill>
                   <a:srgbClr val="888888"/>
                 </a:solidFill>
-                <a:latin typeface="Calibri"/>
+                <a:latin typeface="Atkinson Hyperlegible Next"/>
                 <a:ea typeface="Calibri"/>
                 <a:cs typeface="Calibri"/>
                 <a:sym typeface="Calibri"/>
@@ -12030,7 +12030,7 @@
                 <a:solidFill>
                   <a:srgbClr val="888888"/>
                 </a:solidFill>
-                <a:latin typeface="Calibri"/>
+                <a:latin typeface="Atkinson Hyperlegible Next"/>
                 <a:ea typeface="Calibri"/>
                 <a:cs typeface="Calibri"/>
                 <a:sym typeface="Calibri"/>
@@ -12056,7 +12056,7 @@
                 <a:solidFill>
                   <a:srgbClr val="888888"/>
                 </a:solidFill>
-                <a:latin typeface="Calibri"/>
+                <a:latin typeface="Atkinson Hyperlegible Next"/>
                 <a:ea typeface="Calibri"/>
                 <a:cs typeface="Calibri"/>
                 <a:sym typeface="Calibri"/>
@@ -12082,7 +12082,7 @@
                 <a:solidFill>
                   <a:srgbClr val="888888"/>
                 </a:solidFill>
-                <a:latin typeface="Calibri"/>
+                <a:latin typeface="Atkinson Hyperlegible Next"/>
                 <a:ea typeface="Calibri"/>
                 <a:cs typeface="Calibri"/>
                 <a:sym typeface="Calibri"/>
@@ -12108,7 +12108,7 @@
                 <a:solidFill>
                   <a:srgbClr val="888888"/>
                 </a:solidFill>
-                <a:latin typeface="Calibri"/>
+                <a:latin typeface="Atkinson Hyperlegible Next"/>
                 <a:ea typeface="Calibri"/>
                 <a:cs typeface="Calibri"/>
                 <a:sym typeface="Calibri"/>
@@ -12134,7 +12134,7 @@
                 <a:solidFill>
                   <a:srgbClr val="888888"/>
                 </a:solidFill>
-                <a:latin typeface="Calibri"/>
+                <a:latin typeface="Atkinson Hyperlegible Next"/>
                 <a:ea typeface="Calibri"/>
                 <a:cs typeface="Calibri"/>
                 <a:sym typeface="Calibri"/>
@@ -12160,7 +12160,7 @@
                 <a:solidFill>
                   <a:srgbClr val="888888"/>
                 </a:solidFill>
-                <a:latin typeface="Calibri"/>
+                <a:latin typeface="Atkinson Hyperlegible Next"/>
                 <a:ea typeface="Calibri"/>
                 <a:cs typeface="Calibri"/>
                 <a:sym typeface="Calibri"/>
@@ -12186,7 +12186,7 @@
                 <a:solidFill>
                   <a:srgbClr val="888888"/>
                 </a:solidFill>
-                <a:latin typeface="Calibri"/>
+                <a:latin typeface="Atkinson Hyperlegible Next"/>
                 <a:ea typeface="Calibri"/>
                 <a:cs typeface="Calibri"/>
                 <a:sym typeface="Calibri"/>
@@ -12212,7 +12212,7 @@
                 <a:solidFill>
                   <a:srgbClr val="888888"/>
                 </a:solidFill>
-                <a:latin typeface="Calibri"/>
+                <a:latin typeface="Atkinson Hyperlegible Next"/>
                 <a:ea typeface="Calibri"/>
                 <a:cs typeface="Calibri"/>
                 <a:sym typeface="Calibri"/>
@@ -12238,7 +12238,7 @@
                 <a:solidFill>
                   <a:srgbClr val="888888"/>
                 </a:solidFill>
-                <a:latin typeface="Calibri"/>
+                <a:latin typeface="Atkinson Hyperlegible Next"/>
                 <a:ea typeface="Calibri"/>
                 <a:cs typeface="Calibri"/>
                 <a:sym typeface="Calibri"/>
@@ -13031,7 +13031,7 @@
                 <a:solidFill>
                   <a:srgbClr val="888888"/>
                 </a:solidFill>
-                <a:latin typeface="Calibri"/>
+                <a:latin typeface="Atkinson Hyperlegible Next"/>
                 <a:ea typeface="Calibri"/>
                 <a:cs typeface="Calibri"/>
                 <a:sym typeface="Calibri"/>
@@ -13057,7 +13057,7 @@
                 <a:solidFill>
                   <a:srgbClr val="888888"/>
                 </a:solidFill>
-                <a:latin typeface="Calibri"/>
+                <a:latin typeface="Atkinson Hyperlegible Next"/>
                 <a:ea typeface="Calibri"/>
                 <a:cs typeface="Calibri"/>
                 <a:sym typeface="Calibri"/>
@@ -13083,7 +13083,7 @@
                 <a:solidFill>
                   <a:srgbClr val="888888"/>
                 </a:solidFill>
-                <a:latin typeface="Calibri"/>
+                <a:latin typeface="Atkinson Hyperlegible Next"/>
                 <a:ea typeface="Calibri"/>
                 <a:cs typeface="Calibri"/>
                 <a:sym typeface="Calibri"/>
@@ -13109,7 +13109,7 @@
                 <a:solidFill>
                   <a:srgbClr val="888888"/>
                 </a:solidFill>
-                <a:latin typeface="Calibri"/>
+                <a:latin typeface="Atkinson Hyperlegible Next"/>
                 <a:ea typeface="Calibri"/>
                 <a:cs typeface="Calibri"/>
                 <a:sym typeface="Calibri"/>
@@ -13135,7 +13135,7 @@
                 <a:solidFill>
                   <a:srgbClr val="888888"/>
                 </a:solidFill>
-                <a:latin typeface="Calibri"/>
+                <a:latin typeface="Atkinson Hyperlegible Next"/>
                 <a:ea typeface="Calibri"/>
                 <a:cs typeface="Calibri"/>
                 <a:sym typeface="Calibri"/>
@@ -13161,7 +13161,7 @@
                 <a:solidFill>
                   <a:srgbClr val="888888"/>
                 </a:solidFill>
-                <a:latin typeface="Calibri"/>
+                <a:latin typeface="Atkinson Hyperlegible Next"/>
                 <a:ea typeface="Calibri"/>
                 <a:cs typeface="Calibri"/>
                 <a:sym typeface="Calibri"/>
@@ -13187,7 +13187,7 @@
                 <a:solidFill>
                   <a:srgbClr val="888888"/>
                 </a:solidFill>
-                <a:latin typeface="Calibri"/>
+                <a:latin typeface="Atkinson Hyperlegible Next"/>
                 <a:ea typeface="Calibri"/>
                 <a:cs typeface="Calibri"/>
                 <a:sym typeface="Calibri"/>
@@ -13213,7 +13213,7 @@
                 <a:solidFill>
                   <a:srgbClr val="888888"/>
                 </a:solidFill>
-                <a:latin typeface="Calibri"/>
+                <a:latin typeface="Atkinson Hyperlegible Next"/>
                 <a:ea typeface="Calibri"/>
                 <a:cs typeface="Calibri"/>
                 <a:sym typeface="Calibri"/>
@@ -13239,7 +13239,7 @@
                 <a:solidFill>
                   <a:srgbClr val="888888"/>
                 </a:solidFill>
-                <a:latin typeface="Calibri"/>
+                <a:latin typeface="Atkinson Hyperlegible Next"/>
                 <a:ea typeface="Calibri"/>
                 <a:cs typeface="Calibri"/>
                 <a:sym typeface="Calibri"/>
@@ -14007,7 +14007,7 @@
                 <a:solidFill>
                   <a:srgbClr val="888888"/>
                 </a:solidFill>
-                <a:latin typeface="Calibri"/>
+                <a:latin typeface="Atkinson Hyperlegible Next"/>
                 <a:ea typeface="Calibri"/>
                 <a:cs typeface="Calibri"/>
                 <a:sym typeface="Calibri"/>
@@ -14033,7 +14033,7 @@
                 <a:solidFill>
                   <a:srgbClr val="888888"/>
                 </a:solidFill>
-                <a:latin typeface="Calibri"/>
+                <a:latin typeface="Atkinson Hyperlegible Next"/>
                 <a:ea typeface="Calibri"/>
                 <a:cs typeface="Calibri"/>
                 <a:sym typeface="Calibri"/>
@@ -14059,7 +14059,7 @@
                 <a:solidFill>
                   <a:srgbClr val="888888"/>
                 </a:solidFill>
-                <a:latin typeface="Calibri"/>
+                <a:latin typeface="Atkinson Hyperlegible Next"/>
                 <a:ea typeface="Calibri"/>
                 <a:cs typeface="Calibri"/>
                 <a:sym typeface="Calibri"/>
@@ -14085,7 +14085,7 @@
                 <a:solidFill>
                   <a:srgbClr val="888888"/>
                 </a:solidFill>
-                <a:latin typeface="Calibri"/>
+                <a:latin typeface="Atkinson Hyperlegible Next"/>
                 <a:ea typeface="Calibri"/>
                 <a:cs typeface="Calibri"/>
                 <a:sym typeface="Calibri"/>
@@ -14111,7 +14111,7 @@
                 <a:solidFill>
                   <a:srgbClr val="888888"/>
                 </a:solidFill>
-                <a:latin typeface="Calibri"/>
+                <a:latin typeface="Atkinson Hyperlegible Next"/>
                 <a:ea typeface="Calibri"/>
                 <a:cs typeface="Calibri"/>
                 <a:sym typeface="Calibri"/>
@@ -14137,7 +14137,7 @@
                 <a:solidFill>
                   <a:srgbClr val="888888"/>
                 </a:solidFill>
-                <a:latin typeface="Calibri"/>
+                <a:latin typeface="Atkinson Hyperlegible Next"/>
                 <a:ea typeface="Calibri"/>
                 <a:cs typeface="Calibri"/>
                 <a:sym typeface="Calibri"/>
@@ -14163,7 +14163,7 @@
                 <a:solidFill>
                   <a:srgbClr val="888888"/>
                 </a:solidFill>
-                <a:latin typeface="Calibri"/>
+                <a:latin typeface="Atkinson Hyperlegible Next"/>
                 <a:ea typeface="Calibri"/>
                 <a:cs typeface="Calibri"/>
                 <a:sym typeface="Calibri"/>
@@ -14189,7 +14189,7 @@
                 <a:solidFill>
                   <a:srgbClr val="888888"/>
                 </a:solidFill>
-                <a:latin typeface="Calibri"/>
+                <a:latin typeface="Atkinson Hyperlegible Next"/>
                 <a:ea typeface="Calibri"/>
                 <a:cs typeface="Calibri"/>
                 <a:sym typeface="Calibri"/>
@@ -14215,7 +14215,7 @@
                 <a:solidFill>
                   <a:srgbClr val="888888"/>
                 </a:solidFill>
-                <a:latin typeface="Calibri"/>
+                <a:latin typeface="Atkinson Hyperlegible Next"/>
                 <a:ea typeface="Calibri"/>
                 <a:cs typeface="Calibri"/>
                 <a:sym typeface="Calibri"/>
@@ -14321,7 +14321,7 @@
                 <a:solidFill>
                   <a:schemeClr val="dk1"/>
                 </a:solidFill>
-                <a:latin typeface="Calibri"/>
+                <a:latin typeface="Atkinson Hyperlegible Next"/>
                 <a:ea typeface="Calibri"/>
                 <a:cs typeface="Calibri"/>
                 <a:sym typeface="Calibri"/>
@@ -14347,7 +14347,7 @@
                 <a:solidFill>
                   <a:srgbClr val="000000"/>
                 </a:solidFill>
-                <a:latin typeface="Arial"/>
+                <a:latin typeface="Atkinson Hyperlegible Next"/>
                 <a:ea typeface="Arial"/>
                 <a:cs typeface="Arial"/>
                 <a:sym typeface="Arial"/>
@@ -14373,7 +14373,7 @@
                 <a:solidFill>
                   <a:srgbClr val="000000"/>
                 </a:solidFill>
-                <a:latin typeface="Arial"/>
+                <a:latin typeface="Atkinson Hyperlegible Next"/>
                 <a:ea typeface="Arial"/>
                 <a:cs typeface="Arial"/>
                 <a:sym typeface="Arial"/>
@@ -14399,7 +14399,7 @@
                 <a:solidFill>
                   <a:srgbClr val="000000"/>
                 </a:solidFill>
-                <a:latin typeface="Arial"/>
+                <a:latin typeface="Atkinson Hyperlegible Next"/>
                 <a:ea typeface="Arial"/>
                 <a:cs typeface="Arial"/>
                 <a:sym typeface="Arial"/>
@@ -14425,7 +14425,7 @@
                 <a:solidFill>
                   <a:srgbClr val="000000"/>
                 </a:solidFill>
-                <a:latin typeface="Arial"/>
+                <a:latin typeface="Atkinson Hyperlegible Next"/>
                 <a:ea typeface="Arial"/>
                 <a:cs typeface="Arial"/>
                 <a:sym typeface="Arial"/>
@@ -14451,7 +14451,7 @@
                 <a:solidFill>
                   <a:srgbClr val="000000"/>
                 </a:solidFill>
-                <a:latin typeface="Arial"/>
+                <a:latin typeface="Atkinson Hyperlegible Next"/>
                 <a:ea typeface="Arial"/>
                 <a:cs typeface="Arial"/>
                 <a:sym typeface="Arial"/>
@@ -14477,7 +14477,7 @@
                 <a:solidFill>
                   <a:srgbClr val="000000"/>
                 </a:solidFill>
-                <a:latin typeface="Arial"/>
+                <a:latin typeface="Atkinson Hyperlegible Next"/>
                 <a:ea typeface="Arial"/>
                 <a:cs typeface="Arial"/>
                 <a:sym typeface="Arial"/>
@@ -14503,7 +14503,7 @@
                 <a:solidFill>
                   <a:srgbClr val="000000"/>
                 </a:solidFill>
-                <a:latin typeface="Arial"/>
+                <a:latin typeface="Atkinson Hyperlegible Next"/>
                 <a:ea typeface="Arial"/>
                 <a:cs typeface="Arial"/>
                 <a:sym typeface="Arial"/>
@@ -14529,7 +14529,7 @@
                 <a:solidFill>
                   <a:srgbClr val="000000"/>
                 </a:solidFill>
-                <a:latin typeface="Arial"/>
+                <a:latin typeface="Atkinson Hyperlegible Next"/>
                 <a:ea typeface="Arial"/>
                 <a:cs typeface="Arial"/>
                 <a:sym typeface="Arial"/>
@@ -14589,7 +14589,7 @@
                 <a:solidFill>
                   <a:schemeClr val="dk1"/>
                 </a:solidFill>
-                <a:latin typeface="Calibri"/>
+                <a:latin typeface="Atkinson Hyperlegible Next"/>
                 <a:ea typeface="Calibri"/>
                 <a:cs typeface="Calibri"/>
                 <a:sym typeface="Calibri"/>
@@ -14615,7 +14615,7 @@
                 <a:solidFill>
                   <a:schemeClr val="dk1"/>
                 </a:solidFill>
-                <a:latin typeface="Calibri"/>
+                <a:latin typeface="Atkinson Hyperlegible Next"/>
                 <a:ea typeface="Calibri"/>
                 <a:cs typeface="Calibri"/>
                 <a:sym typeface="Calibri"/>
@@ -14641,7 +14641,7 @@
                 <a:solidFill>
                   <a:schemeClr val="dk1"/>
                 </a:solidFill>
-                <a:latin typeface="Calibri"/>
+                <a:latin typeface="Atkinson Hyperlegible Next"/>
                 <a:ea typeface="Calibri"/>
                 <a:cs typeface="Calibri"/>
                 <a:sym typeface="Calibri"/>
@@ -14667,7 +14667,7 @@
                 <a:solidFill>
                   <a:schemeClr val="dk1"/>
                 </a:solidFill>
-                <a:latin typeface="Calibri"/>
+                <a:latin typeface="Atkinson Hyperlegible Next"/>
                 <a:ea typeface="Calibri"/>
                 <a:cs typeface="Calibri"/>
                 <a:sym typeface="Calibri"/>
@@ -14693,7 +14693,7 @@
                 <a:solidFill>
                   <a:schemeClr val="dk1"/>
                 </a:solidFill>
-                <a:latin typeface="Calibri"/>
+                <a:latin typeface="Atkinson Hyperlegible Next"/>
                 <a:ea typeface="Calibri"/>
                 <a:cs typeface="Calibri"/>
                 <a:sym typeface="Calibri"/>
@@ -14719,7 +14719,7 @@
                 <a:solidFill>
                   <a:schemeClr val="dk1"/>
                 </a:solidFill>
-                <a:latin typeface="Calibri"/>
+                <a:latin typeface="Atkinson Hyperlegible Next"/>
                 <a:ea typeface="Calibri"/>
                 <a:cs typeface="Calibri"/>
                 <a:sym typeface="Calibri"/>
@@ -14745,7 +14745,7 @@
                 <a:solidFill>
                   <a:schemeClr val="dk1"/>
                 </a:solidFill>
-                <a:latin typeface="Calibri"/>
+                <a:latin typeface="Atkinson Hyperlegible Next"/>
                 <a:ea typeface="Calibri"/>
                 <a:cs typeface="Calibri"/>
                 <a:sym typeface="Calibri"/>
@@ -14771,7 +14771,7 @@
                 <a:solidFill>
                   <a:schemeClr val="dk1"/>
                 </a:solidFill>
-                <a:latin typeface="Calibri"/>
+                <a:latin typeface="Atkinson Hyperlegible Next"/>
                 <a:ea typeface="Calibri"/>
                 <a:cs typeface="Calibri"/>
                 <a:sym typeface="Calibri"/>
@@ -14797,7 +14797,7 @@
                 <a:solidFill>
                   <a:schemeClr val="dk1"/>
                 </a:solidFill>
-                <a:latin typeface="Calibri"/>
+                <a:latin typeface="Atkinson Hyperlegible Next"/>
                 <a:ea typeface="Calibri"/>
                 <a:cs typeface="Calibri"/>
                 <a:sym typeface="Calibri"/>
@@ -14857,7 +14857,7 @@
                 <a:solidFill>
                   <a:srgbClr val="888888"/>
                 </a:solidFill>
-                <a:latin typeface="Calibri"/>
+                <a:latin typeface="Atkinson Hyperlegible Next"/>
                 <a:ea typeface="Calibri"/>
                 <a:cs typeface="Calibri"/>
                 <a:sym typeface="Calibri"/>
@@ -14883,7 +14883,7 @@
                 <a:solidFill>
                   <a:schemeClr val="dk1"/>
                 </a:solidFill>
-                <a:latin typeface="Calibri"/>
+                <a:latin typeface="Atkinson Hyperlegible Next"/>
                 <a:ea typeface="Calibri"/>
                 <a:cs typeface="Calibri"/>
                 <a:sym typeface="Calibri"/>
@@ -14909,7 +14909,7 @@
                 <a:solidFill>
                   <a:schemeClr val="dk1"/>
                 </a:solidFill>
-                <a:latin typeface="Calibri"/>
+                <a:latin typeface="Atkinson Hyperlegible Next"/>
                 <a:ea typeface="Calibri"/>
                 <a:cs typeface="Calibri"/>
                 <a:sym typeface="Calibri"/>
@@ -14935,7 +14935,7 @@
                 <a:solidFill>
                   <a:schemeClr val="dk1"/>
                 </a:solidFill>
-                <a:latin typeface="Calibri"/>
+                <a:latin typeface="Atkinson Hyperlegible Next"/>
                 <a:ea typeface="Calibri"/>
                 <a:cs typeface="Calibri"/>
                 <a:sym typeface="Calibri"/>
@@ -14961,7 +14961,7 @@
                 <a:solidFill>
                   <a:schemeClr val="dk1"/>
                 </a:solidFill>
-                <a:latin typeface="Calibri"/>
+                <a:latin typeface="Atkinson Hyperlegible Next"/>
                 <a:ea typeface="Calibri"/>
                 <a:cs typeface="Calibri"/>
                 <a:sym typeface="Calibri"/>
@@ -14987,7 +14987,7 @@
                 <a:solidFill>
                   <a:schemeClr val="dk1"/>
                 </a:solidFill>
-                <a:latin typeface="Calibri"/>
+                <a:latin typeface="Atkinson Hyperlegible Next"/>
                 <a:ea typeface="Calibri"/>
                 <a:cs typeface="Calibri"/>
                 <a:sym typeface="Calibri"/>
@@ -15013,7 +15013,7 @@
                 <a:solidFill>
                   <a:schemeClr val="dk1"/>
                 </a:solidFill>
-                <a:latin typeface="Calibri"/>
+                <a:latin typeface="Atkinson Hyperlegible Next"/>
                 <a:ea typeface="Calibri"/>
                 <a:cs typeface="Calibri"/>
                 <a:sym typeface="Calibri"/>
@@ -15039,7 +15039,7 @@
                 <a:solidFill>
                   <a:schemeClr val="dk1"/>
                 </a:solidFill>
-                <a:latin typeface="Calibri"/>
+                <a:latin typeface="Atkinson Hyperlegible Next"/>
                 <a:ea typeface="Calibri"/>
                 <a:cs typeface="Calibri"/>
                 <a:sym typeface="Calibri"/>
@@ -15065,7 +15065,7 @@
                 <a:solidFill>
                   <a:schemeClr val="dk1"/>
                 </a:solidFill>
-                <a:latin typeface="Calibri"/>
+                <a:latin typeface="Atkinson Hyperlegible Next"/>
                 <a:ea typeface="Calibri"/>
                 <a:cs typeface="Calibri"/>
                 <a:sym typeface="Calibri"/>
@@ -15125,7 +15125,7 @@
                 <a:solidFill>
                   <a:srgbClr val="888888"/>
                 </a:solidFill>
-                <a:latin typeface="Calibri"/>
+                <a:latin typeface="Atkinson Hyperlegible Next"/>
                 <a:ea typeface="Calibri"/>
                 <a:cs typeface="Calibri"/>
                 <a:sym typeface="Calibri"/>
@@ -15151,7 +15151,7 @@
                 <a:solidFill>
                   <a:schemeClr val="dk1"/>
                 </a:solidFill>
-                <a:latin typeface="Calibri"/>
+                <a:latin typeface="Atkinson Hyperlegible Next"/>
                 <a:ea typeface="Calibri"/>
                 <a:cs typeface="Calibri"/>
                 <a:sym typeface="Calibri"/>
@@ -15177,7 +15177,7 @@
                 <a:solidFill>
                   <a:schemeClr val="dk1"/>
                 </a:solidFill>
-                <a:latin typeface="Calibri"/>
+                <a:latin typeface="Atkinson Hyperlegible Next"/>
                 <a:ea typeface="Calibri"/>
                 <a:cs typeface="Calibri"/>
                 <a:sym typeface="Calibri"/>
@@ -15203,7 +15203,7 @@
                 <a:solidFill>
                   <a:schemeClr val="dk1"/>
                 </a:solidFill>
-                <a:latin typeface="Calibri"/>
+                <a:latin typeface="Atkinson Hyperlegible Next"/>
                 <a:ea typeface="Calibri"/>
                 <a:cs typeface="Calibri"/>
                 <a:sym typeface="Calibri"/>
@@ -15229,7 +15229,7 @@
                 <a:solidFill>
                   <a:schemeClr val="dk1"/>
                 </a:solidFill>
-                <a:latin typeface="Calibri"/>
+                <a:latin typeface="Atkinson Hyperlegible Next"/>
                 <a:ea typeface="Calibri"/>
                 <a:cs typeface="Calibri"/>
                 <a:sym typeface="Calibri"/>
@@ -15255,7 +15255,7 @@
                 <a:solidFill>
                   <a:schemeClr val="dk1"/>
                 </a:solidFill>
-                <a:latin typeface="Calibri"/>
+                <a:latin typeface="Atkinson Hyperlegible Next"/>
                 <a:ea typeface="Calibri"/>
                 <a:cs typeface="Calibri"/>
                 <a:sym typeface="Calibri"/>
@@ -15281,7 +15281,7 @@
                 <a:solidFill>
                   <a:schemeClr val="dk1"/>
                 </a:solidFill>
-                <a:latin typeface="Calibri"/>
+                <a:latin typeface="Atkinson Hyperlegible Next"/>
                 <a:ea typeface="Calibri"/>
                 <a:cs typeface="Calibri"/>
                 <a:sym typeface="Calibri"/>
@@ -15307,7 +15307,7 @@
                 <a:solidFill>
                   <a:schemeClr val="dk1"/>
                 </a:solidFill>
-                <a:latin typeface="Calibri"/>
+                <a:latin typeface="Atkinson Hyperlegible Next"/>
                 <a:ea typeface="Calibri"/>
                 <a:cs typeface="Calibri"/>
                 <a:sym typeface="Calibri"/>
@@ -15333,7 +15333,7 @@
                 <a:solidFill>
                   <a:schemeClr val="dk1"/>
                 </a:solidFill>
-                <a:latin typeface="Calibri"/>
+                <a:latin typeface="Atkinson Hyperlegible Next"/>
                 <a:ea typeface="Calibri"/>
                 <a:cs typeface="Calibri"/>
                 <a:sym typeface="Calibri"/>
@@ -15393,7 +15393,7 @@
                 <a:solidFill>
                   <a:srgbClr val="888888"/>
                 </a:solidFill>
-                <a:latin typeface="Calibri"/>
+                <a:latin typeface="Atkinson Hyperlegible Next"/>
                 <a:ea typeface="Calibri"/>
                 <a:cs typeface="Calibri"/>
                 <a:sym typeface="Calibri"/>
@@ -15419,7 +15419,7 @@
                 <a:solidFill>
                   <a:srgbClr val="888888"/>
                 </a:solidFill>
-                <a:latin typeface="Calibri"/>
+                <a:latin typeface="Atkinson Hyperlegible Next"/>
                 <a:ea typeface="Calibri"/>
                 <a:cs typeface="Calibri"/>
                 <a:sym typeface="Calibri"/>
@@ -15445,7 +15445,7 @@
                 <a:solidFill>
                   <a:srgbClr val="888888"/>
                 </a:solidFill>
-                <a:latin typeface="Calibri"/>
+                <a:latin typeface="Atkinson Hyperlegible Next"/>
                 <a:ea typeface="Calibri"/>
                 <a:cs typeface="Calibri"/>
                 <a:sym typeface="Calibri"/>
@@ -15471,7 +15471,7 @@
                 <a:solidFill>
                   <a:srgbClr val="888888"/>
                 </a:solidFill>
-                <a:latin typeface="Calibri"/>
+                <a:latin typeface="Atkinson Hyperlegible Next"/>
                 <a:ea typeface="Calibri"/>
                 <a:cs typeface="Calibri"/>
                 <a:sym typeface="Calibri"/>
@@ -15497,7 +15497,7 @@
                 <a:solidFill>
                   <a:srgbClr val="888888"/>
                 </a:solidFill>
-                <a:latin typeface="Calibri"/>
+                <a:latin typeface="Atkinson Hyperlegible Next"/>
                 <a:ea typeface="Calibri"/>
                 <a:cs typeface="Calibri"/>
                 <a:sym typeface="Calibri"/>
@@ -15523,7 +15523,7 @@
                 <a:solidFill>
                   <a:srgbClr val="888888"/>
                 </a:solidFill>
-                <a:latin typeface="Calibri"/>
+                <a:latin typeface="Atkinson Hyperlegible Next"/>
                 <a:ea typeface="Calibri"/>
                 <a:cs typeface="Calibri"/>
                 <a:sym typeface="Calibri"/>
@@ -15549,7 +15549,7 @@
                 <a:solidFill>
                   <a:srgbClr val="888888"/>
                 </a:solidFill>
-                <a:latin typeface="Calibri"/>
+                <a:latin typeface="Atkinson Hyperlegible Next"/>
                 <a:ea typeface="Calibri"/>
                 <a:cs typeface="Calibri"/>
                 <a:sym typeface="Calibri"/>
@@ -15575,7 +15575,7 @@
                 <a:solidFill>
                   <a:srgbClr val="888888"/>
                 </a:solidFill>
-                <a:latin typeface="Calibri"/>
+                <a:latin typeface="Atkinson Hyperlegible Next"/>
                 <a:ea typeface="Calibri"/>
                 <a:cs typeface="Calibri"/>
                 <a:sym typeface="Calibri"/>
@@ -15601,7 +15601,7 @@
                 <a:solidFill>
                   <a:srgbClr val="888888"/>
                 </a:solidFill>
-                <a:latin typeface="Calibri"/>
+                <a:latin typeface="Atkinson Hyperlegible Next"/>
                 <a:ea typeface="Calibri"/>
                 <a:cs typeface="Calibri"/>
                 <a:sym typeface="Calibri"/>
@@ -15673,7 +15673,7 @@
           <a:solidFill>
             <a:srgbClr val="000000"/>
           </a:solidFill>
-          <a:latin typeface="Arial"/>
+          <a:latin typeface="Atkinson Hyperlegible Next"/>
           <a:ea typeface="Arial"/>
           <a:cs typeface="Arial"/>
           <a:sym typeface="Arial"/>
@@ -15697,7 +15697,7 @@
           <a:solidFill>
             <a:srgbClr val="000000"/>
           </a:solidFill>
-          <a:latin typeface="Arial"/>
+          <a:latin typeface="Atkinson Hyperlegible Next"/>
           <a:ea typeface="Arial"/>
           <a:cs typeface="Arial"/>
           <a:sym typeface="Arial"/>
@@ -15721,7 +15721,7 @@
           <a:solidFill>
             <a:srgbClr val="000000"/>
           </a:solidFill>
-          <a:latin typeface="Arial"/>
+          <a:latin typeface="Atkinson Hyperlegible Next"/>
           <a:ea typeface="Arial"/>
           <a:cs typeface="Arial"/>
           <a:sym typeface="Arial"/>
@@ -15745,7 +15745,7 @@
           <a:solidFill>
             <a:srgbClr val="000000"/>
           </a:solidFill>
-          <a:latin typeface="Arial"/>
+          <a:latin typeface="Atkinson Hyperlegible Next"/>
           <a:ea typeface="Arial"/>
           <a:cs typeface="Arial"/>
           <a:sym typeface="Arial"/>
@@ -15769,7 +15769,7 @@
           <a:solidFill>
             <a:srgbClr val="000000"/>
           </a:solidFill>
-          <a:latin typeface="Arial"/>
+          <a:latin typeface="Atkinson Hyperlegible Next"/>
           <a:ea typeface="Arial"/>
           <a:cs typeface="Arial"/>
           <a:sym typeface="Arial"/>
@@ -15793,7 +15793,7 @@
           <a:solidFill>
             <a:srgbClr val="000000"/>
           </a:solidFill>
-          <a:latin typeface="Arial"/>
+          <a:latin typeface="Atkinson Hyperlegible Next"/>
           <a:ea typeface="Arial"/>
           <a:cs typeface="Arial"/>
           <a:sym typeface="Arial"/>
@@ -15817,7 +15817,7 @@
           <a:solidFill>
             <a:srgbClr val="000000"/>
           </a:solidFill>
-          <a:latin typeface="Arial"/>
+          <a:latin typeface="Atkinson Hyperlegible Next"/>
           <a:ea typeface="Arial"/>
           <a:cs typeface="Arial"/>
           <a:sym typeface="Arial"/>
@@ -15841,7 +15841,7 @@
           <a:solidFill>
             <a:srgbClr val="000000"/>
           </a:solidFill>
-          <a:latin typeface="Arial"/>
+          <a:latin typeface="Atkinson Hyperlegible Next"/>
           <a:ea typeface="Arial"/>
           <a:cs typeface="Arial"/>
           <a:sym typeface="Arial"/>
@@ -15865,7 +15865,7 @@
           <a:solidFill>
             <a:srgbClr val="000000"/>
           </a:solidFill>
-          <a:latin typeface="Arial"/>
+          <a:latin typeface="Atkinson Hyperlegible Next"/>
           <a:ea typeface="Arial"/>
           <a:cs typeface="Arial"/>
           <a:sym typeface="Arial"/>
@@ -15902,7 +15902,7 @@
           <a:solidFill>
             <a:srgbClr val="000000"/>
           </a:solidFill>
-          <a:latin typeface="Arial"/>
+          <a:latin typeface="Atkinson Hyperlegible Next"/>
           <a:ea typeface="Arial"/>
           <a:cs typeface="Arial"/>
           <a:sym typeface="Arial"/>
@@ -15926,7 +15926,7 @@
           <a:solidFill>
             <a:srgbClr val="000000"/>
           </a:solidFill>
-          <a:latin typeface="Arial"/>
+          <a:latin typeface="Atkinson Hyperlegible Next"/>
           <a:ea typeface="Arial"/>
           <a:cs typeface="Arial"/>
           <a:sym typeface="Arial"/>
@@ -15950,7 +15950,7 @@
           <a:solidFill>
             <a:srgbClr val="000000"/>
           </a:solidFill>
-          <a:latin typeface="Arial"/>
+          <a:latin typeface="Atkinson Hyperlegible Next"/>
           <a:ea typeface="Arial"/>
           <a:cs typeface="Arial"/>
           <a:sym typeface="Arial"/>
@@ -15974,7 +15974,7 @@
           <a:solidFill>
             <a:srgbClr val="000000"/>
           </a:solidFill>
-          <a:latin typeface="Arial"/>
+          <a:latin typeface="Atkinson Hyperlegible Next"/>
           <a:ea typeface="Arial"/>
           <a:cs typeface="Arial"/>
           <a:sym typeface="Arial"/>
@@ -15998,7 +15998,7 @@
           <a:solidFill>
             <a:srgbClr val="000000"/>
           </a:solidFill>
-          <a:latin typeface="Arial"/>
+          <a:latin typeface="Atkinson Hyperlegible Next"/>
           <a:ea typeface="Arial"/>
           <a:cs typeface="Arial"/>
           <a:sym typeface="Arial"/>
@@ -16022,7 +16022,7 @@
           <a:solidFill>
             <a:srgbClr val="000000"/>
           </a:solidFill>
-          <a:latin typeface="Arial"/>
+          <a:latin typeface="Atkinson Hyperlegible Next"/>
           <a:ea typeface="Arial"/>
           <a:cs typeface="Arial"/>
           <a:sym typeface="Arial"/>
@@ -16046,7 +16046,7 @@
           <a:solidFill>
             <a:srgbClr val="000000"/>
           </a:solidFill>
-          <a:latin typeface="Arial"/>
+          <a:latin typeface="Atkinson Hyperlegible Next"/>
           <a:ea typeface="Arial"/>
           <a:cs typeface="Arial"/>
           <a:sym typeface="Arial"/>
@@ -16070,7 +16070,7 @@
           <a:solidFill>
             <a:srgbClr val="000000"/>
           </a:solidFill>
-          <a:latin typeface="Arial"/>
+          <a:latin typeface="Atkinson Hyperlegible Next"/>
           <a:ea typeface="Arial"/>
           <a:cs typeface="Arial"/>
           <a:sym typeface="Arial"/>
@@ -16094,7 +16094,7 @@
           <a:solidFill>
             <a:srgbClr val="000000"/>
           </a:solidFill>
-          <a:latin typeface="Arial"/>
+          <a:latin typeface="Atkinson Hyperlegible Next"/>
           <a:ea typeface="Arial"/>
           <a:cs typeface="Arial"/>
           <a:sym typeface="Arial"/>
@@ -16131,7 +16131,7 @@
           <a:solidFill>
             <a:srgbClr val="000000"/>
           </a:solidFill>
-          <a:latin typeface="Arial"/>
+          <a:latin typeface="Atkinson Hyperlegible Next"/>
           <a:ea typeface="Arial"/>
           <a:cs typeface="Arial"/>
           <a:sym typeface="Arial"/>
@@ -16155,7 +16155,7 @@
           <a:solidFill>
             <a:srgbClr val="000000"/>
           </a:solidFill>
-          <a:latin typeface="Arial"/>
+          <a:latin typeface="Atkinson Hyperlegible Next"/>
           <a:ea typeface="Arial"/>
           <a:cs typeface="Arial"/>
           <a:sym typeface="Arial"/>
@@ -16179,7 +16179,7 @@
           <a:solidFill>
             <a:srgbClr val="000000"/>
           </a:solidFill>
-          <a:latin typeface="Arial"/>
+          <a:latin typeface="Atkinson Hyperlegible Next"/>
           <a:ea typeface="Arial"/>
           <a:cs typeface="Arial"/>
           <a:sym typeface="Arial"/>
@@ -16203,7 +16203,7 @@
           <a:solidFill>
             <a:srgbClr val="000000"/>
           </a:solidFill>
-          <a:latin typeface="Arial"/>
+          <a:latin typeface="Atkinson Hyperlegible Next"/>
           <a:ea typeface="Arial"/>
           <a:cs typeface="Arial"/>
           <a:sym typeface="Arial"/>
@@ -16227,7 +16227,7 @@
           <a:solidFill>
             <a:srgbClr val="000000"/>
           </a:solidFill>
-          <a:latin typeface="Arial"/>
+          <a:latin typeface="Atkinson Hyperlegible Next"/>
           <a:ea typeface="Arial"/>
           <a:cs typeface="Arial"/>
           <a:sym typeface="Arial"/>
@@ -16251,7 +16251,7 @@
           <a:solidFill>
             <a:srgbClr val="000000"/>
           </a:solidFill>
-          <a:latin typeface="Arial"/>
+          <a:latin typeface="Atkinson Hyperlegible Next"/>
           <a:ea typeface="Arial"/>
           <a:cs typeface="Arial"/>
           <a:sym typeface="Arial"/>
@@ -16275,7 +16275,7 @@
           <a:solidFill>
             <a:srgbClr val="000000"/>
           </a:solidFill>
-          <a:latin typeface="Arial"/>
+          <a:latin typeface="Atkinson Hyperlegible Next"/>
           <a:ea typeface="Arial"/>
           <a:cs typeface="Arial"/>
           <a:sym typeface="Arial"/>
@@ -16299,7 +16299,7 @@
           <a:solidFill>
             <a:srgbClr val="000000"/>
           </a:solidFill>
-          <a:latin typeface="Arial"/>
+          <a:latin typeface="Atkinson Hyperlegible Next"/>
           <a:ea typeface="Arial"/>
           <a:cs typeface="Arial"/>
           <a:sym typeface="Arial"/>
@@ -16323,7 +16323,7 @@
           <a:solidFill>
             <a:srgbClr val="000000"/>
           </a:solidFill>
-          <a:latin typeface="Arial"/>
+          <a:latin typeface="Atkinson Hyperlegible Next"/>
           <a:ea typeface="Arial"/>
           <a:cs typeface="Arial"/>
           <a:sym typeface="Arial"/>
@@ -16445,7 +16445,7 @@
               <a:solidFill>
                 <a:schemeClr val="lt1"/>
               </a:solidFill>
-              <a:latin typeface="Arial"/>
+              <a:latin typeface="Atkinson Hyperlegible Next"/>
               <a:ea typeface="Arial"/>
               <a:cs typeface="Arial"/>
               <a:sym typeface="Arial"/>
@@ -16469,7 +16469,7 @@
                 <a:solidFill>
                   <a:schemeClr val="lt1"/>
                 </a:solidFill>
-                <a:latin typeface="Arial"/>
+                <a:latin typeface="Atkinson Hyperlegible Next"/>
                 <a:ea typeface="Arial"/>
                 <a:cs typeface="Arial"/>
                 <a:sym typeface="Arial"/>
@@ -16480,7 +16480,7 @@
               <a:solidFill>
                 <a:srgbClr val="000000"/>
               </a:solidFill>
-              <a:latin typeface="Arial"/>
+              <a:latin typeface="Atkinson Hyperlegible Next"/>
               <a:ea typeface="Arial"/>
               <a:cs typeface="Arial"/>
               <a:sym typeface="Arial"/>
@@ -16535,7 +16535,7 @@
                 <a:solidFill>
                   <a:schemeClr val="lt1"/>
                 </a:solidFill>
-                <a:latin typeface="Arial"/>
+                <a:latin typeface="Atkinson Hyperlegible Next"/>
                 <a:ea typeface="Arial"/>
                 <a:cs typeface="Arial"/>
                 <a:sym typeface="Arial"/>
@@ -16546,7 +16546,7 @@
               <a:solidFill>
                 <a:schemeClr val="lt1"/>
               </a:solidFill>
-              <a:latin typeface="Arial"/>
+              <a:latin typeface="Atkinson Hyperlegible Next"/>
               <a:ea typeface="Arial"/>
               <a:cs typeface="Arial"/>
               <a:sym typeface="Arial"/>
@@ -16654,7 +16654,7 @@
               <a:solidFill>
                 <a:schemeClr val="lt1"/>
               </a:solidFill>
-              <a:latin typeface="Calibri"/>
+              <a:latin typeface="Atkinson Hyperlegible Next"/>
               <a:ea typeface="Calibri"/>
               <a:cs typeface="Calibri"/>
               <a:sym typeface="Calibri"/>
@@ -16709,7 +16709,7 @@
                 <a:solidFill>
                   <a:srgbClr val="A5A5A5"/>
                 </a:solidFill>
-                <a:latin typeface="Arial"/>
+                <a:latin typeface="Atkinson Hyperlegible Next"/>
                 <a:ea typeface="Arial"/>
                 <a:cs typeface="Arial"/>
                 <a:sym typeface="Arial"/>
@@ -16720,7 +16720,7 @@
               <a:solidFill>
                 <a:srgbClr val="000000"/>
               </a:solidFill>
-              <a:latin typeface="Arial"/>
+              <a:latin typeface="Atkinson Hyperlegible Next"/>
               <a:ea typeface="Arial"/>
               <a:cs typeface="Arial"/>
               <a:sym typeface="Arial"/>
@@ -16776,7 +16776,7 @@
               <a:solidFill>
                 <a:schemeClr val="lt1"/>
               </a:solidFill>
-              <a:latin typeface="Calibri"/>
+              <a:latin typeface="Atkinson Hyperlegible Next"/>
               <a:ea typeface="Calibri"/>
               <a:cs typeface="Calibri"/>
               <a:sym typeface="Calibri"/>
@@ -16831,7 +16831,7 @@
                 <a:solidFill>
                   <a:srgbClr val="A5A5A5"/>
                 </a:solidFill>
-                <a:latin typeface="Arial"/>
+                <a:latin typeface="Atkinson Hyperlegible Next"/>
                 <a:ea typeface="Arial"/>
                 <a:cs typeface="Arial"/>
                 <a:sym typeface="Arial"/>
@@ -16842,7 +16842,7 @@
               <a:solidFill>
                 <a:srgbClr val="000000"/>
               </a:solidFill>
-              <a:latin typeface="Arial"/>
+              <a:latin typeface="Atkinson Hyperlegible Next"/>
               <a:ea typeface="Arial"/>
               <a:cs typeface="Arial"/>
               <a:sym typeface="Arial"/>
@@ -16897,7 +16897,7 @@
                 <a:solidFill>
                   <a:srgbClr val="E84B36"/>
                 </a:solidFill>
-                <a:latin typeface="Arial"/>
+                <a:latin typeface="Atkinson Hyperlegible Next"/>
                 <a:ea typeface="Arial"/>
                 <a:cs typeface="Arial"/>
                 <a:sym typeface="Arial"/>
@@ -16908,7 +16908,7 @@
               <a:solidFill>
                 <a:srgbClr val="E84B36"/>
               </a:solidFill>
-              <a:latin typeface="Arial"/>
+              <a:latin typeface="Atkinson Hyperlegible Next"/>
               <a:ea typeface="Arial"/>
               <a:cs typeface="Arial"/>
               <a:sym typeface="Arial"/>
@@ -16932,7 +16932,7 @@
               <a:solidFill>
                 <a:schemeClr val="dk1"/>
               </a:solidFill>
-              <a:latin typeface="Arial"/>
+              <a:latin typeface="Atkinson Hyperlegible Next"/>
               <a:ea typeface="Arial"/>
               <a:cs typeface="Arial"/>
               <a:sym typeface="Arial"/>
@@ -16954,7 +16954,7 @@
             </a:pPr>
             <a:r>
               <a:rPr lang="en-US" sz="1800">
-                <a:latin typeface="Arial"/>
+                <a:latin typeface="Atkinson Hyperlegible Next"/>
                 <a:ea typeface="Arial"/>
                 <a:cs typeface="Arial"/>
                 <a:sym typeface="Arial"/>
@@ -16981,7 +16981,7 @@
               <a:solidFill>
                 <a:schemeClr val="dk1"/>
               </a:solidFill>
-              <a:latin typeface="Arial"/>
+              <a:latin typeface="Atkinson Hyperlegible Next"/>
               <a:ea typeface="Arial"/>
               <a:cs typeface="Arial"/>
               <a:sym typeface="Arial"/>
@@ -17006,7 +17006,7 @@
                 <a:solidFill>
                   <a:srgbClr val="15264B"/>
                 </a:solidFill>
-                <a:latin typeface="Arial"/>
+                <a:latin typeface="Atkinson Hyperlegible Next"/>
                 <a:ea typeface="Arial"/>
                 <a:cs typeface="Arial"/>
                 <a:sym typeface="Arial"/>
@@ -17037,7 +17037,7 @@
               <a:solidFill>
                 <a:schemeClr val="dk1"/>
               </a:solidFill>
-              <a:latin typeface="Arial"/>
+              <a:latin typeface="Atkinson Hyperlegible Next"/>
               <a:ea typeface="Arial"/>
               <a:cs typeface="Arial"/>
               <a:sym typeface="Arial"/>
@@ -17059,7 +17059,7 @@
             </a:pPr>
             <a:r>
               <a:rPr lang="en-US" sz="1800">
-                <a:latin typeface="Arial"/>
+                <a:latin typeface="Atkinson Hyperlegible Next"/>
                 <a:ea typeface="Arial"/>
                 <a:cs typeface="Arial"/>
                 <a:sym typeface="Arial"/>
@@ -17070,7 +17070,7 @@
               <a:solidFill>
                 <a:schemeClr val="dk1"/>
               </a:solidFill>
-              <a:latin typeface="Arial"/>
+              <a:latin typeface="Atkinson Hyperlegible Next"/>
               <a:ea typeface="Arial"/>
               <a:cs typeface="Arial"/>
               <a:sym typeface="Arial"/>
@@ -17126,7 +17126,7 @@
               <a:solidFill>
                 <a:srgbClr val="13294B"/>
               </a:solidFill>
-              <a:latin typeface="Calibri"/>
+              <a:latin typeface="Atkinson Hyperlegible Next"/>
               <a:ea typeface="Calibri"/>
               <a:cs typeface="Calibri"/>
               <a:sym typeface="Calibri"/>
@@ -17181,7 +17181,7 @@
                 <a:solidFill>
                   <a:schemeClr val="lt1"/>
                 </a:solidFill>
-                <a:latin typeface="Arial"/>
+                <a:latin typeface="Atkinson Hyperlegible Next"/>
                 <a:ea typeface="Arial"/>
                 <a:cs typeface="Arial"/>
                 <a:sym typeface="Arial"/>
@@ -17192,7 +17192,7 @@
               <a:solidFill>
                 <a:schemeClr val="lt1"/>
               </a:solidFill>
-              <a:latin typeface="Arial"/>
+              <a:latin typeface="Atkinson Hyperlegible Next"/>
               <a:ea typeface="Arial"/>
               <a:cs typeface="Arial"/>
               <a:sym typeface="Arial"/>
@@ -17269,7 +17269,7 @@
                 <a:solidFill>
                   <a:srgbClr val="13294B"/>
                 </a:solidFill>
-                <a:latin typeface="Arial"/>
+                <a:latin typeface="Atkinson Hyperlegible Next"/>
                 <a:ea typeface="Arial"/>
                 <a:cs typeface="Arial"/>
                 <a:sym typeface="Arial"/>
@@ -17412,7 +17412,7 @@
                 <a:solidFill>
                   <a:srgbClr val="13294B"/>
                 </a:solidFill>
-                <a:latin typeface="Arial"/>
+                <a:latin typeface="Atkinson Hyperlegible Next"/>
                 <a:ea typeface="Arial"/>
                 <a:cs typeface="Arial"/>
                 <a:sym typeface="Arial"/>
@@ -17494,7 +17494,7 @@
               <a:solidFill>
                 <a:schemeClr val="lt1"/>
               </a:solidFill>
-              <a:latin typeface="Calibri"/>
+              <a:latin typeface="Atkinson Hyperlegible Next"/>
               <a:ea typeface="Calibri"/>
               <a:cs typeface="Calibri"/>
               <a:sym typeface="Calibri"/>
@@ -17549,7 +17549,7 @@
                 <a:solidFill>
                   <a:srgbClr val="A5A5A5"/>
                 </a:solidFill>
-                <a:latin typeface="Arial"/>
+                <a:latin typeface="Atkinson Hyperlegible Next"/>
                 <a:ea typeface="Arial"/>
                 <a:cs typeface="Arial"/>
                 <a:sym typeface="Arial"/>
@@ -17560,7 +17560,7 @@
               <a:solidFill>
                 <a:srgbClr val="000000"/>
               </a:solidFill>
-              <a:latin typeface="Arial"/>
+              <a:latin typeface="Atkinson Hyperlegible Next"/>
               <a:ea typeface="Arial"/>
               <a:cs typeface="Arial"/>
               <a:sym typeface="Arial"/>
@@ -17610,7 +17610,7 @@
                 <a:solidFill>
                   <a:srgbClr val="E84B36"/>
                 </a:solidFill>
-                <a:latin typeface="Arial"/>
+                <a:latin typeface="Atkinson Hyperlegible Next"/>
                 <a:ea typeface="Arial"/>
                 <a:cs typeface="Arial"/>
                 <a:sym typeface="Arial"/>
@@ -17621,7 +17621,7 @@
               <a:solidFill>
                 <a:srgbClr val="E84B36"/>
               </a:solidFill>
-              <a:latin typeface="Arial"/>
+              <a:latin typeface="Atkinson Hyperlegible Next"/>
               <a:ea typeface="Arial"/>
               <a:cs typeface="Arial"/>
               <a:sym typeface="Arial"/>
@@ -17644,7 +17644,7 @@
               <a:solidFill>
                 <a:schemeClr val="dk1"/>
               </a:solidFill>
-              <a:latin typeface="Arial"/>
+              <a:latin typeface="Atkinson Hyperlegible Next"/>
               <a:ea typeface="Arial"/>
               <a:cs typeface="Arial"/>
               <a:sym typeface="Arial"/>
@@ -17668,7 +17668,7 @@
                 <a:solidFill>
                   <a:srgbClr val="000000"/>
                 </a:solidFill>
-                <a:latin typeface="Arial"/>
+                <a:latin typeface="Atkinson Hyperlegible Next"/>
                 <a:ea typeface="Arial"/>
                 <a:cs typeface="Arial"/>
                 <a:sym typeface="Arial"/>
@@ -17694,7 +17694,7 @@
               <a:solidFill>
                 <a:schemeClr val="dk1"/>
               </a:solidFill>
-              <a:latin typeface="Arial"/>
+              <a:latin typeface="Atkinson Hyperlegible Next"/>
               <a:ea typeface="Arial"/>
               <a:cs typeface="Arial"/>
               <a:sym typeface="Arial"/>
@@ -17718,7 +17718,7 @@
                 <a:solidFill>
                   <a:srgbClr val="15264B"/>
                 </a:solidFill>
-                <a:latin typeface="Arial"/>
+                <a:latin typeface="Atkinson Hyperlegible Next"/>
                 <a:ea typeface="Arial"/>
                 <a:cs typeface="Arial"/>
                 <a:sym typeface="Arial"/>
@@ -17729,7 +17729,7 @@
               <a:solidFill>
                 <a:srgbClr val="15264B"/>
               </a:solidFill>
-              <a:latin typeface="Arial"/>
+              <a:latin typeface="Atkinson Hyperlegible Next"/>
               <a:ea typeface="Arial"/>
               <a:cs typeface="Arial"/>
               <a:sym typeface="Arial"/>
@@ -17752,7 +17752,7 @@
               <a:solidFill>
                 <a:schemeClr val="dk1"/>
               </a:solidFill>
-              <a:latin typeface="Arial"/>
+              <a:latin typeface="Atkinson Hyperlegible Next"/>
               <a:ea typeface="Arial"/>
               <a:cs typeface="Arial"/>
               <a:sym typeface="Arial"/>
@@ -17776,7 +17776,7 @@
                 <a:solidFill>
                   <a:srgbClr val="000000"/>
                 </a:solidFill>
-                <a:latin typeface="Arial"/>
+                <a:latin typeface="Atkinson Hyperlegible Next"/>
                 <a:ea typeface="Arial"/>
                 <a:cs typeface="Arial"/>
                 <a:sym typeface="Arial"/>
@@ -17787,7 +17787,7 @@
               <a:solidFill>
                 <a:schemeClr val="dk1"/>
               </a:solidFill>
-              <a:latin typeface="Arial"/>
+              <a:latin typeface="Atkinson Hyperlegible Next"/>
               <a:ea typeface="Arial"/>
               <a:cs typeface="Arial"/>
               <a:sym typeface="Arial"/>
@@ -17843,7 +17843,7 @@
               <a:solidFill>
                 <a:srgbClr val="13294B"/>
               </a:solidFill>
-              <a:latin typeface="Calibri"/>
+              <a:latin typeface="Atkinson Hyperlegible Next"/>
               <a:ea typeface="Calibri"/>
               <a:cs typeface="Calibri"/>
               <a:sym typeface="Calibri"/>
@@ -17898,7 +17898,7 @@
                 <a:solidFill>
                   <a:schemeClr val="lt1"/>
                 </a:solidFill>
-                <a:latin typeface="Arial"/>
+                <a:latin typeface="Atkinson Hyperlegible Next"/>
                 <a:ea typeface="Arial"/>
                 <a:cs typeface="Arial"/>
                 <a:sym typeface="Arial"/>
@@ -17909,7 +17909,7 @@
               <a:solidFill>
                 <a:schemeClr val="lt1"/>
               </a:solidFill>
-              <a:latin typeface="Arial"/>
+              <a:latin typeface="Atkinson Hyperlegible Next"/>
               <a:ea typeface="Arial"/>
               <a:cs typeface="Arial"/>
               <a:sym typeface="Arial"/>
@@ -17986,7 +17986,7 @@
                 <a:solidFill>
                   <a:srgbClr val="13294B"/>
                 </a:solidFill>
-                <a:latin typeface="Arial"/>
+                <a:latin typeface="Atkinson Hyperlegible Next"/>
                 <a:ea typeface="Arial"/>
                 <a:cs typeface="Arial"/>
                 <a:sym typeface="Arial"/>
@@ -18129,7 +18129,7 @@
                 <a:solidFill>
                   <a:srgbClr val="13294B"/>
                 </a:solidFill>
-                <a:latin typeface="Arial"/>
+                <a:latin typeface="Atkinson Hyperlegible Next"/>
                 <a:ea typeface="Arial"/>
                 <a:cs typeface="Arial"/>
                 <a:sym typeface="Arial"/>
@@ -18211,7 +18211,7 @@
               <a:solidFill>
                 <a:schemeClr val="lt1"/>
               </a:solidFill>
-              <a:latin typeface="Calibri"/>
+              <a:latin typeface="Atkinson Hyperlegible Next"/>
               <a:ea typeface="Calibri"/>
               <a:cs typeface="Calibri"/>
               <a:sym typeface="Calibri"/>
@@ -18266,7 +18266,7 @@
                 <a:solidFill>
                   <a:srgbClr val="A5A5A5"/>
                 </a:solidFill>
-                <a:latin typeface="Arial"/>
+                <a:latin typeface="Atkinson Hyperlegible Next"/>
                 <a:ea typeface="Arial"/>
                 <a:cs typeface="Arial"/>
                 <a:sym typeface="Arial"/>
@@ -18277,7 +18277,7 @@
               <a:solidFill>
                 <a:srgbClr val="000000"/>
               </a:solidFill>
-              <a:latin typeface="Arial"/>
+              <a:latin typeface="Atkinson Hyperlegible Next"/>
               <a:ea typeface="Arial"/>
               <a:cs typeface="Arial"/>
               <a:sym typeface="Arial"/>
@@ -18327,7 +18327,7 @@
                 <a:solidFill>
                   <a:srgbClr val="E84B36"/>
                 </a:solidFill>
-                <a:latin typeface="Arial"/>
+                <a:latin typeface="Atkinson Hyperlegible Next"/>
                 <a:ea typeface="Arial"/>
                 <a:cs typeface="Arial"/>
                 <a:sym typeface="Arial"/>
@@ -18338,7 +18338,7 @@
               <a:solidFill>
                 <a:srgbClr val="E84B36"/>
               </a:solidFill>
-              <a:latin typeface="Arial"/>
+              <a:latin typeface="Atkinson Hyperlegible Next"/>
               <a:ea typeface="Arial"/>
               <a:cs typeface="Arial"/>
               <a:sym typeface="Arial"/>
@@ -18361,7 +18361,7 @@
               <a:solidFill>
                 <a:schemeClr val="dk1"/>
               </a:solidFill>
-              <a:latin typeface="Arial"/>
+              <a:latin typeface="Atkinson Hyperlegible Next"/>
               <a:ea typeface="Arial"/>
               <a:cs typeface="Arial"/>
               <a:sym typeface="Arial"/>
@@ -18385,7 +18385,7 @@
                 <a:solidFill>
                   <a:srgbClr val="000000"/>
                 </a:solidFill>
-                <a:latin typeface="Arial"/>
+                <a:latin typeface="Atkinson Hyperlegible Next"/>
                 <a:ea typeface="Arial"/>
                 <a:cs typeface="Arial"/>
                 <a:sym typeface="Arial"/>
@@ -18411,7 +18411,7 @@
               <a:solidFill>
                 <a:schemeClr val="dk1"/>
               </a:solidFill>
-              <a:latin typeface="Arial"/>
+              <a:latin typeface="Atkinson Hyperlegible Next"/>
               <a:ea typeface="Arial"/>
               <a:cs typeface="Arial"/>
               <a:sym typeface="Arial"/>
@@ -18435,7 +18435,7 @@
                 <a:solidFill>
                   <a:srgbClr val="15264B"/>
                 </a:solidFill>
-                <a:latin typeface="Arial"/>
+                <a:latin typeface="Atkinson Hyperlegible Next"/>
                 <a:ea typeface="Arial"/>
                 <a:cs typeface="Arial"/>
                 <a:sym typeface="Arial"/>
@@ -18446,7 +18446,7 @@
               <a:solidFill>
                 <a:srgbClr val="15264B"/>
               </a:solidFill>
-              <a:latin typeface="Arial"/>
+              <a:latin typeface="Atkinson Hyperlegible Next"/>
               <a:ea typeface="Arial"/>
               <a:cs typeface="Arial"/>
               <a:sym typeface="Arial"/>
@@ -18469,7 +18469,7 @@
               <a:solidFill>
                 <a:schemeClr val="dk1"/>
               </a:solidFill>
-              <a:latin typeface="Arial"/>
+              <a:latin typeface="Atkinson Hyperlegible Next"/>
               <a:ea typeface="Arial"/>
               <a:cs typeface="Arial"/>
               <a:sym typeface="Arial"/>
@@ -18493,7 +18493,7 @@
                 <a:solidFill>
                   <a:srgbClr val="000000"/>
                 </a:solidFill>
-                <a:latin typeface="Arial"/>
+                <a:latin typeface="Atkinson Hyperlegible Next"/>
                 <a:ea typeface="Arial"/>
                 <a:cs typeface="Arial"/>
                 <a:sym typeface="Arial"/>
@@ -18504,7 +18504,7 @@
               <a:solidFill>
                 <a:schemeClr val="dk1"/>
               </a:solidFill>
-              <a:latin typeface="Arial"/>
+              <a:latin typeface="Atkinson Hyperlegible Next"/>
               <a:ea typeface="Arial"/>
               <a:cs typeface="Arial"/>
               <a:sym typeface="Arial"/>
@@ -18560,7 +18560,7 @@
               <a:solidFill>
                 <a:srgbClr val="13294B"/>
               </a:solidFill>
-              <a:latin typeface="Calibri"/>
+              <a:latin typeface="Atkinson Hyperlegible Next"/>
               <a:ea typeface="Calibri"/>
               <a:cs typeface="Calibri"/>
               <a:sym typeface="Calibri"/>
@@ -18615,7 +18615,7 @@
                 <a:solidFill>
                   <a:schemeClr val="lt1"/>
                 </a:solidFill>
-                <a:latin typeface="Arial"/>
+                <a:latin typeface="Atkinson Hyperlegible Next"/>
                 <a:ea typeface="Arial"/>
                 <a:cs typeface="Arial"/>
                 <a:sym typeface="Arial"/>
@@ -18626,7 +18626,7 @@
               <a:solidFill>
                 <a:schemeClr val="lt1"/>
               </a:solidFill>
-              <a:latin typeface="Arial"/>
+              <a:latin typeface="Atkinson Hyperlegible Next"/>
               <a:ea typeface="Arial"/>
               <a:cs typeface="Arial"/>
               <a:sym typeface="Arial"/>
@@ -18703,7 +18703,7 @@
                 <a:solidFill>
                   <a:srgbClr val="13294B"/>
                 </a:solidFill>
-                <a:latin typeface="Arial"/>
+                <a:latin typeface="Atkinson Hyperlegible Next"/>
                 <a:ea typeface="Arial"/>
                 <a:cs typeface="Arial"/>
                 <a:sym typeface="Arial"/>
@@ -18846,7 +18846,7 @@
                 <a:solidFill>
                   <a:srgbClr val="13294B"/>
                 </a:solidFill>
-                <a:latin typeface="Arial"/>
+                <a:latin typeface="Atkinson Hyperlegible Next"/>
                 <a:ea typeface="Arial"/>
                 <a:cs typeface="Arial"/>
                 <a:sym typeface="Arial"/>
@@ -18928,7 +18928,7 @@
               <a:solidFill>
                 <a:schemeClr val="lt1"/>
               </a:solidFill>
-              <a:latin typeface="Calibri"/>
+              <a:latin typeface="Atkinson Hyperlegible Next"/>
               <a:ea typeface="Calibri"/>
               <a:cs typeface="Calibri"/>
               <a:sym typeface="Calibri"/>
@@ -18983,7 +18983,7 @@
                 <a:solidFill>
                   <a:srgbClr val="A5A5A5"/>
                 </a:solidFill>
-                <a:latin typeface="Arial"/>
+                <a:latin typeface="Atkinson Hyperlegible Next"/>
                 <a:ea typeface="Arial"/>
                 <a:cs typeface="Arial"/>
                 <a:sym typeface="Arial"/>
@@ -18994,7 +18994,7 @@
               <a:solidFill>
                 <a:srgbClr val="000000"/>
               </a:solidFill>
-              <a:latin typeface="Arial"/>
+              <a:latin typeface="Atkinson Hyperlegible Next"/>
               <a:ea typeface="Arial"/>
               <a:cs typeface="Arial"/>
               <a:sym typeface="Arial"/>
@@ -19049,7 +19049,7 @@
                 <a:solidFill>
                   <a:schemeClr val="dk1"/>
                 </a:solidFill>
-                <a:latin typeface="Arial"/>
+                <a:latin typeface="Atkinson Hyperlegible Next"/>
                 <a:ea typeface="Arial"/>
                 <a:cs typeface="Arial"/>
                 <a:sym typeface="Arial"/>
@@ -19060,7 +19060,7 @@
               <a:solidFill>
                 <a:srgbClr val="000000"/>
               </a:solidFill>
-              <a:latin typeface="Arial"/>
+              <a:latin typeface="Atkinson Hyperlegible Next"/>
               <a:ea typeface="Arial"/>
               <a:cs typeface="Arial"/>
               <a:sym typeface="Arial"/>
@@ -19116,7 +19116,7 @@
               <a:solidFill>
                 <a:srgbClr val="13294B"/>
               </a:solidFill>
-              <a:latin typeface="Calibri"/>
+              <a:latin typeface="Atkinson Hyperlegible Next"/>
               <a:ea typeface="Calibri"/>
               <a:cs typeface="Calibri"/>
               <a:sym typeface="Calibri"/>
@@ -19171,7 +19171,7 @@
                 <a:solidFill>
                   <a:schemeClr val="lt1"/>
                 </a:solidFill>
-                <a:latin typeface="Arial"/>
+                <a:latin typeface="Atkinson Hyperlegible Next"/>
                 <a:ea typeface="Arial"/>
                 <a:cs typeface="Arial"/>
                 <a:sym typeface="Arial"/>
@@ -19182,7 +19182,7 @@
               <a:solidFill>
                 <a:schemeClr val="lt1"/>
               </a:solidFill>
-              <a:latin typeface="Arial"/>
+              <a:latin typeface="Atkinson Hyperlegible Next"/>
               <a:ea typeface="Arial"/>
               <a:cs typeface="Arial"/>
               <a:sym typeface="Arial"/>
@@ -19259,7 +19259,7 @@
                 <a:solidFill>
                   <a:srgbClr val="13294B"/>
                 </a:solidFill>
-                <a:latin typeface="Arial"/>
+                <a:latin typeface="Atkinson Hyperlegible Next"/>
                 <a:ea typeface="Arial"/>
                 <a:cs typeface="Arial"/>
                 <a:sym typeface="Arial"/>
@@ -19402,7 +19402,7 @@
                 <a:solidFill>
                   <a:srgbClr val="13294B"/>
                 </a:solidFill>
-                <a:latin typeface="Arial"/>
+                <a:latin typeface="Atkinson Hyperlegible Next"/>
                 <a:ea typeface="Arial"/>
                 <a:cs typeface="Arial"/>
                 <a:sym typeface="Arial"/>
@@ -19484,7 +19484,7 @@
               <a:solidFill>
                 <a:schemeClr val="lt1"/>
               </a:solidFill>
-              <a:latin typeface="Calibri"/>
+              <a:latin typeface="Atkinson Hyperlegible Next"/>
               <a:ea typeface="Calibri"/>
               <a:cs typeface="Calibri"/>
               <a:sym typeface="Calibri"/>
@@ -19539,7 +19539,7 @@
                 <a:solidFill>
                   <a:srgbClr val="A5A5A5"/>
                 </a:solidFill>
-                <a:latin typeface="Arial"/>
+                <a:latin typeface="Atkinson Hyperlegible Next"/>
                 <a:ea typeface="Arial"/>
                 <a:cs typeface="Arial"/>
                 <a:sym typeface="Arial"/>
@@ -19550,7 +19550,7 @@
               <a:solidFill>
                 <a:srgbClr val="000000"/>
               </a:solidFill>
-              <a:latin typeface="Arial"/>
+              <a:latin typeface="Atkinson Hyperlegible Next"/>
               <a:ea typeface="Arial"/>
               <a:cs typeface="Arial"/>
               <a:sym typeface="Arial"/>
@@ -19605,7 +19605,7 @@
                 <a:solidFill>
                   <a:schemeClr val="dk1"/>
                 </a:solidFill>
-                <a:latin typeface="Arial"/>
+                <a:latin typeface="Atkinson Hyperlegible Next"/>
                 <a:ea typeface="Arial"/>
                 <a:cs typeface="Arial"/>
                 <a:sym typeface="Arial"/>
@@ -19637,7 +19637,7 @@
                 <a:solidFill>
                   <a:schemeClr val="dk1"/>
                 </a:solidFill>
-                <a:latin typeface="Arial"/>
+                <a:latin typeface="Atkinson Hyperlegible Next"/>
                 <a:ea typeface="Arial"/>
                 <a:cs typeface="Arial"/>
                 <a:sym typeface="Arial"/>
@@ -19648,7 +19648,7 @@
               <a:solidFill>
                 <a:srgbClr val="000000"/>
               </a:solidFill>
-              <a:latin typeface="Arial"/>
+              <a:latin typeface="Atkinson Hyperlegible Next"/>
               <a:ea typeface="Arial"/>
               <a:cs typeface="Arial"/>
               <a:sym typeface="Arial"/>
@@ -19725,7 +19725,7 @@
                 <a:solidFill>
                   <a:srgbClr val="13294B"/>
                 </a:solidFill>
-                <a:latin typeface="Arial"/>
+                <a:latin typeface="Atkinson Hyperlegible Next"/>
                 <a:ea typeface="Arial"/>
                 <a:cs typeface="Arial"/>
                 <a:sym typeface="Arial"/>
@@ -19868,7 +19868,7 @@
                 <a:solidFill>
                   <a:srgbClr val="13294B"/>
                 </a:solidFill>
-                <a:latin typeface="Arial"/>
+                <a:latin typeface="Atkinson Hyperlegible Next"/>
                 <a:ea typeface="Arial"/>
                 <a:cs typeface="Arial"/>
                 <a:sym typeface="Arial"/>
@@ -19952,7 +19952,7 @@
                 <a:solidFill>
                   <a:schemeClr val="lt1"/>
                 </a:solidFill>
-                <a:latin typeface="Arial"/>
+                <a:latin typeface="Atkinson Hyperlegible Next"/>
                 <a:ea typeface="Arial"/>
                 <a:cs typeface="Arial"/>
                 <a:sym typeface="Arial"/>
@@ -19963,7 +19963,7 @@
               <a:solidFill>
                 <a:schemeClr val="lt1"/>
               </a:solidFill>
-              <a:latin typeface="Arial"/>
+              <a:latin typeface="Atkinson Hyperlegible Next"/>
               <a:ea typeface="Arial"/>
               <a:cs typeface="Arial"/>
               <a:sym typeface="Arial"/>
@@ -19986,7 +19986,7 @@
               <a:solidFill>
                 <a:schemeClr val="lt1"/>
               </a:solidFill>
-              <a:latin typeface="Arial"/>
+              <a:latin typeface="Atkinson Hyperlegible Next"/>
               <a:ea typeface="Arial"/>
               <a:cs typeface="Arial"/>
               <a:sym typeface="Arial"/>
@@ -20010,7 +20010,7 @@
                 <a:solidFill>
                   <a:schemeClr val="lt1"/>
                 </a:solidFill>
-                <a:latin typeface="Arial"/>
+                <a:latin typeface="Atkinson Hyperlegible Next"/>
                 <a:ea typeface="Arial"/>
                 <a:cs typeface="Arial"/>
                 <a:sym typeface="Arial"/>
@@ -20036,7 +20036,7 @@
               <a:solidFill>
                 <a:schemeClr val="lt1"/>
               </a:solidFill>
-              <a:latin typeface="Arial"/>
+              <a:latin typeface="Atkinson Hyperlegible Next"/>
               <a:ea typeface="Arial"/>
               <a:cs typeface="Arial"/>
               <a:sym typeface="Arial"/>
@@ -20060,7 +20060,7 @@
                 <a:solidFill>
                   <a:schemeClr val="lt1"/>
                 </a:solidFill>
-                <a:latin typeface="Arial"/>
+                <a:latin typeface="Atkinson Hyperlegible Next"/>
                 <a:ea typeface="Arial"/>
                 <a:cs typeface="Arial"/>
                 <a:sym typeface="Arial"/>
@@ -20071,7 +20071,7 @@
               <a:solidFill>
                 <a:schemeClr val="lt1"/>
               </a:solidFill>
-              <a:latin typeface="Arial"/>
+              <a:latin typeface="Atkinson Hyperlegible Next"/>
               <a:ea typeface="Arial"/>
               <a:cs typeface="Arial"/>
               <a:sym typeface="Arial"/>
@@ -20094,7 +20094,7 @@
               <a:solidFill>
                 <a:schemeClr val="lt1"/>
               </a:solidFill>
-              <a:latin typeface="Arial"/>
+              <a:latin typeface="Atkinson Hyperlegible Next"/>
               <a:ea typeface="Arial"/>
               <a:cs typeface="Arial"/>
               <a:sym typeface="Arial"/>
@@ -20118,7 +20118,7 @@
                 <a:solidFill>
                   <a:schemeClr val="lt1"/>
                 </a:solidFill>
-                <a:latin typeface="Arial"/>
+                <a:latin typeface="Atkinson Hyperlegible Next"/>
                 <a:ea typeface="Arial"/>
                 <a:cs typeface="Arial"/>
                 <a:sym typeface="Arial"/>
@@ -20129,7 +20129,7 @@
               <a:solidFill>
                 <a:schemeClr val="lt1"/>
               </a:solidFill>
-              <a:latin typeface="Arial"/>
+              <a:latin typeface="Atkinson Hyperlegible Next"/>
               <a:ea typeface="Arial"/>
               <a:cs typeface="Arial"/>
               <a:sym typeface="Arial"/>
@@ -20185,7 +20185,7 @@
               <a:solidFill>
                 <a:schemeClr val="lt1"/>
               </a:solidFill>
-              <a:latin typeface="Calibri"/>
+              <a:latin typeface="Atkinson Hyperlegible Next"/>
               <a:ea typeface="Calibri"/>
               <a:cs typeface="Calibri"/>
               <a:sym typeface="Calibri"/>
@@ -20240,7 +20240,7 @@
                 <a:solidFill>
                   <a:srgbClr val="A5A5A5"/>
                 </a:solidFill>
-                <a:latin typeface="Arial"/>
+                <a:latin typeface="Atkinson Hyperlegible Next"/>
                 <a:ea typeface="Arial"/>
                 <a:cs typeface="Arial"/>
                 <a:sym typeface="Arial"/>
@@ -20251,7 +20251,7 @@
               <a:solidFill>
                 <a:srgbClr val="000000"/>
               </a:solidFill>
-              <a:latin typeface="Arial"/>
+              <a:latin typeface="Atkinson Hyperlegible Next"/>
               <a:ea typeface="Arial"/>
               <a:cs typeface="Arial"/>
               <a:sym typeface="Arial"/>
@@ -20328,7 +20328,7 @@
                 <a:solidFill>
                   <a:schemeClr val="lt1"/>
                 </a:solidFill>
-                <a:latin typeface="Arial"/>
+                <a:latin typeface="Atkinson Hyperlegible Next"/>
                 <a:ea typeface="Arial"/>
                 <a:cs typeface="Arial"/>
                 <a:sym typeface="Arial"/>
@@ -20471,7 +20471,7 @@
                 <a:solidFill>
                   <a:schemeClr val="lt1"/>
                 </a:solidFill>
-                <a:latin typeface="Arial"/>
+                <a:latin typeface="Atkinson Hyperlegible Next"/>
                 <a:ea typeface="Arial"/>
                 <a:cs typeface="Arial"/>
                 <a:sym typeface="Arial"/>
@@ -20580,7 +20580,7 @@
               <a:solidFill>
                 <a:schemeClr val="lt1"/>
               </a:solidFill>
-              <a:latin typeface="Calibri"/>
+              <a:latin typeface="Atkinson Hyperlegible Next"/>
               <a:ea typeface="Calibri"/>
               <a:cs typeface="Calibri"/>
               <a:sym typeface="Calibri"/>
@@ -20635,7 +20635,7 @@
                 <a:solidFill>
                   <a:schemeClr val="lt1"/>
                 </a:solidFill>
-                <a:latin typeface="Arial"/>
+                <a:latin typeface="Atkinson Hyperlegible Next"/>
                 <a:ea typeface="Arial"/>
                 <a:cs typeface="Arial"/>
                 <a:sym typeface="Arial"/>
@@ -20646,7 +20646,7 @@
               <a:solidFill>
                 <a:schemeClr val="lt1"/>
               </a:solidFill>
-              <a:latin typeface="Arial"/>
+              <a:latin typeface="Atkinson Hyperlegible Next"/>
               <a:ea typeface="Arial"/>
               <a:cs typeface="Arial"/>
               <a:sym typeface="Arial"/>
@@ -20701,7 +20701,7 @@
                 <a:solidFill>
                   <a:schemeClr val="lt1"/>
                 </a:solidFill>
-                <a:latin typeface="Arial"/>
+                <a:latin typeface="Atkinson Hyperlegible Next"/>
                 <a:ea typeface="Arial"/>
                 <a:cs typeface="Arial"/>
                 <a:sym typeface="Arial"/>
@@ -20733,7 +20733,7 @@
                 <a:solidFill>
                   <a:schemeClr val="lt1"/>
                 </a:solidFill>
-                <a:latin typeface="Arial"/>
+                <a:latin typeface="Atkinson Hyperlegible Next"/>
                 <a:ea typeface="Arial"/>
                 <a:cs typeface="Arial"/>
                 <a:sym typeface="Arial"/>
@@ -20760,7 +20760,7 @@
                 <a:solidFill>
                   <a:schemeClr val="lt1"/>
                 </a:solidFill>
-                <a:latin typeface="Arial"/>
+                <a:latin typeface="Atkinson Hyperlegible Next"/>
                 <a:ea typeface="Arial"/>
                 <a:cs typeface="Arial"/>
                 <a:sym typeface="Arial"/>
@@ -20787,7 +20787,7 @@
                 <a:solidFill>
                   <a:schemeClr val="lt1"/>
                 </a:solidFill>
-                <a:latin typeface="Arial"/>
+                <a:latin typeface="Atkinson Hyperlegible Next"/>
                 <a:ea typeface="Arial"/>
                 <a:cs typeface="Arial"/>
                 <a:sym typeface="Arial"/>
@@ -20814,7 +20814,7 @@
                 <a:solidFill>
                   <a:schemeClr val="lt1"/>
                 </a:solidFill>
-                <a:latin typeface="Arial"/>
+                <a:latin typeface="Atkinson Hyperlegible Next"/>
                 <a:ea typeface="Arial"/>
                 <a:cs typeface="Arial"/>
                 <a:sym typeface="Arial"/>
@@ -20825,7 +20825,7 @@
               <a:solidFill>
                 <a:schemeClr val="lt1"/>
               </a:solidFill>
-              <a:latin typeface="Arial"/>
+              <a:latin typeface="Atkinson Hyperlegible Next"/>
               <a:ea typeface="Arial"/>
               <a:cs typeface="Arial"/>
               <a:sym typeface="Arial"/>
@@ -20902,7 +20902,7 @@
                 <a:solidFill>
                   <a:schemeClr val="lt1"/>
                 </a:solidFill>
-                <a:latin typeface="Arial"/>
+                <a:latin typeface="Atkinson Hyperlegible Next"/>
                 <a:ea typeface="Arial"/>
                 <a:cs typeface="Arial"/>
                 <a:sym typeface="Arial"/>
@@ -21045,7 +21045,7 @@
                 <a:solidFill>
                   <a:schemeClr val="lt1"/>
                 </a:solidFill>
-                <a:latin typeface="Arial"/>
+                <a:latin typeface="Atkinson Hyperlegible Next"/>
                 <a:ea typeface="Arial"/>
                 <a:cs typeface="Arial"/>
                 <a:sym typeface="Arial"/>
@@ -21134,7 +21134,7 @@
                 <a:solidFill>
                   <a:schemeClr val="lt1"/>
                 </a:solidFill>
-                <a:latin typeface="Arial"/>
+                <a:latin typeface="Atkinson Hyperlegible Next"/>
                 <a:ea typeface="Arial"/>
                 <a:cs typeface="Arial"/>
                 <a:sym typeface="Arial"/>
@@ -21145,7 +21145,7 @@
               <a:solidFill>
                 <a:schemeClr val="lt1"/>
               </a:solidFill>
-              <a:latin typeface="Arial"/>
+              <a:latin typeface="Atkinson Hyperlegible Next"/>
               <a:ea typeface="Arial"/>
               <a:cs typeface="Arial"/>
               <a:sym typeface="Arial"/>
@@ -21168,7 +21168,7 @@
               <a:solidFill>
                 <a:schemeClr val="lt1"/>
               </a:solidFill>
-              <a:latin typeface="Arial"/>
+              <a:latin typeface="Atkinson Hyperlegible Next"/>
               <a:ea typeface="Arial"/>
               <a:cs typeface="Arial"/>
               <a:sym typeface="Arial"/>
@@ -21192,7 +21192,7 @@
                 <a:solidFill>
                   <a:schemeClr val="lt1"/>
                 </a:solidFill>
-                <a:latin typeface="Arial"/>
+                <a:latin typeface="Atkinson Hyperlegible Next"/>
                 <a:ea typeface="Arial"/>
                 <a:cs typeface="Arial"/>
                 <a:sym typeface="Arial"/>
@@ -21219,7 +21219,7 @@
                 <a:solidFill>
                   <a:schemeClr val="lt1"/>
                 </a:solidFill>
-                <a:latin typeface="Arial"/>
+                <a:latin typeface="Atkinson Hyperlegible Next"/>
                 <a:ea typeface="Arial"/>
                 <a:cs typeface="Arial"/>
                 <a:sym typeface="Arial"/>
@@ -21246,7 +21246,7 @@
                 <a:solidFill>
                   <a:schemeClr val="lt1"/>
                 </a:solidFill>
-                <a:latin typeface="Arial"/>
+                <a:latin typeface="Atkinson Hyperlegible Next"/>
                 <a:ea typeface="Arial"/>
                 <a:cs typeface="Arial"/>
                 <a:sym typeface="Arial"/>
@@ -21273,7 +21273,7 @@
                 <a:solidFill>
                   <a:schemeClr val="lt1"/>
                 </a:solidFill>
-                <a:latin typeface="Arial"/>
+                <a:latin typeface="Atkinson Hyperlegible Next"/>
                 <a:ea typeface="Arial"/>
                 <a:cs typeface="Arial"/>
                 <a:sym typeface="Arial"/>
@@ -21299,7 +21299,7 @@
               <a:solidFill>
                 <a:schemeClr val="lt1"/>
               </a:solidFill>
-              <a:latin typeface="Arial"/>
+              <a:latin typeface="Atkinson Hyperlegible Next"/>
               <a:ea typeface="Arial"/>
               <a:cs typeface="Arial"/>
               <a:sym typeface="Arial"/>
@@ -21322,7 +21322,7 @@
               <a:solidFill>
                 <a:schemeClr val="lt1"/>
               </a:solidFill>
-              <a:latin typeface="Arial"/>
+              <a:latin typeface="Atkinson Hyperlegible Next"/>
               <a:ea typeface="Arial"/>
               <a:cs typeface="Arial"/>
               <a:sym typeface="Arial"/>
@@ -21346,7 +21346,7 @@
                 <a:solidFill>
                   <a:schemeClr val="lt1"/>
                 </a:solidFill>
-                <a:latin typeface="Arial"/>
+                <a:latin typeface="Atkinson Hyperlegible Next"/>
                 <a:ea typeface="Arial"/>
                 <a:cs typeface="Arial"/>
                 <a:sym typeface="Arial"/>
@@ -21357,7 +21357,7 @@
               <a:solidFill>
                 <a:schemeClr val="lt1"/>
               </a:solidFill>
-              <a:latin typeface="Arial"/>
+              <a:latin typeface="Atkinson Hyperlegible Next"/>
               <a:ea typeface="Arial"/>
               <a:cs typeface="Arial"/>
               <a:sym typeface="Arial"/>
@@ -21434,7 +21434,7 @@
                 <a:solidFill>
                   <a:schemeClr val="lt1"/>
                 </a:solidFill>
-                <a:latin typeface="Arial"/>
+                <a:latin typeface="Atkinson Hyperlegible Next"/>
                 <a:ea typeface="Arial"/>
                 <a:cs typeface="Arial"/>
                 <a:sym typeface="Arial"/>
@@ -21577,7 +21577,7 @@
                 <a:solidFill>
                   <a:schemeClr val="lt1"/>
                 </a:solidFill>
-                <a:latin typeface="Arial"/>
+                <a:latin typeface="Atkinson Hyperlegible Next"/>
                 <a:ea typeface="Arial"/>
                 <a:cs typeface="Arial"/>
                 <a:sym typeface="Arial"/>
@@ -21671,7 +21671,7 @@
                 <a:solidFill>
                   <a:schemeClr val="lt1"/>
                 </a:solidFill>
-                <a:latin typeface="Arial"/>
+                <a:latin typeface="Atkinson Hyperlegible Next"/>
                 <a:ea typeface="Arial"/>
                 <a:cs typeface="Arial"/>
                 <a:sym typeface="Arial"/>
@@ -21682,7 +21682,7 @@
               <a:solidFill>
                 <a:srgbClr val="000000"/>
               </a:solidFill>
-              <a:latin typeface="Arial"/>
+              <a:latin typeface="Atkinson Hyperlegible Next"/>
               <a:ea typeface="Arial"/>
               <a:cs typeface="Arial"/>
               <a:sym typeface="Arial"/>
@@ -21737,7 +21737,7 @@
                 <a:solidFill>
                   <a:schemeClr val="lt1"/>
                 </a:solidFill>
-                <a:latin typeface="Arial"/>
+                <a:latin typeface="Atkinson Hyperlegible Next"/>
                 <a:ea typeface="Arial"/>
                 <a:cs typeface="Arial"/>
                 <a:sym typeface="Arial"/>
@@ -21769,7 +21769,7 @@
                 <a:solidFill>
                   <a:schemeClr val="lt1"/>
                 </a:solidFill>
-                <a:latin typeface="Arial"/>
+                <a:latin typeface="Atkinson Hyperlegible Next"/>
                 <a:ea typeface="Arial"/>
                 <a:cs typeface="Arial"/>
                 <a:sym typeface="Arial"/>
@@ -21801,7 +21801,7 @@
                 <a:solidFill>
                   <a:schemeClr val="lt1"/>
                 </a:solidFill>
-                <a:latin typeface="Arial"/>
+                <a:latin typeface="Atkinson Hyperlegible Next"/>
                 <a:ea typeface="Arial"/>
                 <a:cs typeface="Arial"/>
                 <a:sym typeface="Arial"/>
@@ -21812,7 +21812,7 @@
               <a:solidFill>
                 <a:schemeClr val="lt1"/>
               </a:solidFill>
-              <a:latin typeface="Arial"/>
+              <a:latin typeface="Atkinson Hyperlegible Next"/>
               <a:ea typeface="Arial"/>
               <a:cs typeface="Arial"/>
               <a:sym typeface="Arial"/>
@@ -21956,7 +21956,7 @@
                 <a:solidFill>
                   <a:schemeClr val="lt1"/>
                 </a:solidFill>
-                <a:latin typeface="Arial"/>
+                <a:latin typeface="Atkinson Hyperlegible Next"/>
                 <a:ea typeface="Arial"/>
                 <a:cs typeface="Arial"/>
                 <a:sym typeface="Arial"/>
@@ -22099,7 +22099,7 @@
                 <a:solidFill>
                   <a:schemeClr val="lt1"/>
                 </a:solidFill>
-                <a:latin typeface="Arial"/>
+                <a:latin typeface="Atkinson Hyperlegible Next"/>
                 <a:ea typeface="Arial"/>
                 <a:cs typeface="Arial"/>
                 <a:sym typeface="Arial"/>
@@ -22284,7 +22284,7 @@
                 <a:solidFill>
                   <a:schemeClr val="lt1"/>
                 </a:solidFill>
-                <a:latin typeface="Arial"/>
+                <a:latin typeface="Atkinson Hyperlegible Next"/>
                 <a:ea typeface="Arial"/>
                 <a:cs typeface="Arial"/>
                 <a:sym typeface="Arial"/>
@@ -22451,7 +22451,7 @@
                 <a:solidFill>
                   <a:schemeClr val="lt1"/>
                 </a:solidFill>
-                <a:latin typeface="Arial"/>
+                <a:latin typeface="Atkinson Hyperlegible Next"/>
                 <a:ea typeface="Arial"/>
                 <a:cs typeface="Arial"/>
                 <a:sym typeface="Arial"/>
@@ -22546,7 +22546,7 @@
                 <a:solidFill>
                   <a:schemeClr val="dk1"/>
                 </a:solidFill>
-                <a:latin typeface="Arial"/>
+                <a:latin typeface="Atkinson Hyperlegible Next"/>
                 <a:ea typeface="Arial"/>
                 <a:cs typeface="Arial"/>
                 <a:sym typeface="Arial"/>
@@ -22565,7 +22565,7 @@
               <a:buSzPts val="3000"/>
             </a:pPr>
             <a:endParaRPr lang="en-US" sz="2400" dirty="0">
-              <a:latin typeface="Arial"/>
+              <a:latin typeface="Atkinson Hyperlegible Next"/>
               <a:ea typeface="Arial"/>
               <a:cs typeface="Arial"/>
               <a:sym typeface="Arial"/>
@@ -22586,7 +22586,7 @@
                 <a:solidFill>
                   <a:schemeClr val="dk1"/>
                 </a:solidFill>
-                <a:latin typeface="Arial"/>
+                <a:latin typeface="Atkinson Hyperlegible Next"/>
                 <a:ea typeface="Arial"/>
                 <a:cs typeface="Arial"/>
                 <a:sym typeface="Arial"/>
@@ -22606,7 +22606,7 @@
             </a:pPr>
             <a:r>
               <a:rPr lang="en-US" sz="2400" dirty="0">
-                <a:latin typeface="Arial"/>
+                <a:latin typeface="Atkinson Hyperlegible Next"/>
                 <a:ea typeface="Arial"/>
                 <a:cs typeface="Arial"/>
                 <a:sym typeface="Arial"/>
@@ -22617,7 +22617,7 @@
               <a:solidFill>
                 <a:schemeClr val="dk1"/>
               </a:solidFill>
-              <a:latin typeface="Arial"/>
+              <a:latin typeface="Atkinson Hyperlegible Next"/>
               <a:ea typeface="Arial"/>
               <a:cs typeface="Arial"/>
               <a:sym typeface="Arial"/>
@@ -22637,7 +22637,7 @@
               <a:solidFill>
                 <a:schemeClr val="dk1"/>
               </a:solidFill>
-              <a:latin typeface="Arial"/>
+              <a:latin typeface="Atkinson Hyperlegible Next"/>
               <a:ea typeface="Arial"/>
               <a:cs typeface="Arial"/>
               <a:sym typeface="Arial"/>
@@ -22699,7 +22699,7 @@
               <a:solidFill>
                 <a:srgbClr val="13294B"/>
               </a:solidFill>
-              <a:latin typeface="Calibri"/>
+              <a:latin typeface="Atkinson Hyperlegible Next"/>
               <a:ea typeface="Calibri"/>
               <a:cs typeface="Calibri"/>
               <a:sym typeface="Calibri"/>
@@ -22760,7 +22760,7 @@
                 <a:solidFill>
                   <a:schemeClr val="lt1"/>
                 </a:solidFill>
-                <a:latin typeface="Arial"/>
+                <a:latin typeface="Atkinson Hyperlegible Next"/>
                 <a:ea typeface="Arial"/>
                 <a:cs typeface="Arial"/>
                 <a:sym typeface="Arial"/>
@@ -22771,7 +22771,7 @@
               <a:solidFill>
                 <a:schemeClr val="lt1"/>
               </a:solidFill>
-              <a:latin typeface="Arial"/>
+              <a:latin typeface="Atkinson Hyperlegible Next"/>
               <a:ea typeface="Arial"/>
               <a:cs typeface="Arial"/>
               <a:sym typeface="Arial"/>
@@ -22860,7 +22860,7 @@
                 <a:solidFill>
                   <a:srgbClr val="13294B"/>
                 </a:solidFill>
-                <a:latin typeface="Arial"/>
+                <a:latin typeface="Atkinson Hyperlegible Next"/>
                 <a:ea typeface="Arial"/>
                 <a:cs typeface="Arial"/>
                 <a:sym typeface="Arial"/>
@@ -23027,7 +23027,7 @@
                 <a:solidFill>
                   <a:srgbClr val="13294B"/>
                 </a:solidFill>
-                <a:latin typeface="Arial"/>
+                <a:latin typeface="Atkinson Hyperlegible Next"/>
                 <a:ea typeface="Arial"/>
                 <a:cs typeface="Arial"/>
                 <a:sym typeface="Arial"/>
@@ -23190,7 +23190,7 @@
                 <a:solidFill>
                   <a:srgbClr val="E84B36"/>
                 </a:solidFill>
-                <a:latin typeface="Arial"/>
+                <a:latin typeface="Atkinson Hyperlegible Next"/>
                 <a:ea typeface="Arial"/>
                 <a:cs typeface="Arial"/>
                 <a:sym typeface="Arial"/>
@@ -23201,7 +23201,7 @@
               <a:solidFill>
                 <a:srgbClr val="E84B36"/>
               </a:solidFill>
-              <a:latin typeface="Arial"/>
+              <a:latin typeface="Atkinson Hyperlegible Next"/>
               <a:ea typeface="Arial"/>
               <a:cs typeface="Arial"/>
               <a:sym typeface="Arial"/>
@@ -23222,7 +23222,7 @@
                 <a:solidFill>
                   <a:schemeClr val="dk1"/>
                 </a:solidFill>
-                <a:latin typeface="Arial"/>
+                <a:latin typeface="Atkinson Hyperlegible Next"/>
                 <a:ea typeface="Arial"/>
                 <a:cs typeface="Arial"/>
                 <a:sym typeface="Arial"/>
@@ -23234,7 +23234,7 @@
                 <a:solidFill>
                   <a:schemeClr val="dk1"/>
                 </a:solidFill>
-                <a:latin typeface="Arial"/>
+                <a:latin typeface="Atkinson Hyperlegible Next"/>
                 <a:ea typeface="Arial"/>
                 <a:cs typeface="Arial"/>
                 <a:sym typeface="Arial"/>
@@ -23246,7 +23246,7 @@
                 <a:solidFill>
                   <a:schemeClr val="dk1"/>
                 </a:solidFill>
-                <a:latin typeface="Arial"/>
+                <a:latin typeface="Atkinson Hyperlegible Next"/>
                 <a:ea typeface="Arial"/>
                 <a:cs typeface="Arial"/>
                 <a:sym typeface="Arial"/>
@@ -23258,7 +23258,7 @@
                 <a:solidFill>
                   <a:schemeClr val="dk1"/>
                 </a:solidFill>
-                <a:latin typeface="Arial"/>
+                <a:latin typeface="Atkinson Hyperlegible Next"/>
                 <a:ea typeface="Arial"/>
                 <a:cs typeface="Arial"/>
                 <a:sym typeface="Arial"/>
@@ -23278,7 +23278,7 @@
             </a:pPr>
             <a:r>
               <a:rPr lang="en-US" sz="1800" b="1" dirty="0">
-                <a:latin typeface="Arial"/>
+                <a:latin typeface="Atkinson Hyperlegible Next"/>
                 <a:ea typeface="Arial"/>
                 <a:cs typeface="Arial"/>
                 <a:sym typeface="Arial"/>
@@ -23287,7 +23287,7 @@
             </a:r>
             <a:r>
               <a:rPr lang="en-US" sz="1800" dirty="0">
-                <a:latin typeface="Arial"/>
+                <a:latin typeface="Atkinson Hyperlegible Next"/>
                 <a:ea typeface="Arial"/>
                 <a:cs typeface="Arial"/>
                 <a:sym typeface="Arial"/>
@@ -23296,7 +23296,7 @@
             </a:r>
             <a:r>
               <a:rPr lang="en-US" sz="1800" b="1" dirty="0">
-                <a:latin typeface="Arial"/>
+                <a:latin typeface="Atkinson Hyperlegible Next"/>
                 <a:ea typeface="Arial"/>
                 <a:cs typeface="Arial"/>
                 <a:sym typeface="Arial"/>
@@ -23305,7 +23305,7 @@
             </a:r>
             <a:r>
               <a:rPr lang="en-US" sz="1800" dirty="0">
-                <a:latin typeface="Arial"/>
+                <a:latin typeface="Atkinson Hyperlegible Next"/>
                 <a:ea typeface="Arial"/>
                 <a:cs typeface="Arial"/>
                 <a:sym typeface="Arial"/>
@@ -23328,7 +23328,7 @@
                 <a:solidFill>
                   <a:schemeClr val="dk1"/>
                 </a:solidFill>
-                <a:latin typeface="Arial"/>
+                <a:latin typeface="Atkinson Hyperlegible Next"/>
                 <a:ea typeface="Arial"/>
                 <a:cs typeface="Arial"/>
                 <a:sym typeface="Arial"/>
@@ -23337,7 +23337,7 @@
             </a:r>
             <a:r>
               <a:rPr lang="en-US" sz="1800" dirty="0">
-                <a:latin typeface="Arial"/>
+                <a:latin typeface="Atkinson Hyperlegible Next"/>
                 <a:ea typeface="Arial"/>
                 <a:cs typeface="Arial"/>
                 <a:sym typeface="Arial"/>
@@ -23346,7 +23346,7 @@
             </a:r>
             <a:r>
               <a:rPr lang="en-US" sz="1800" b="1" dirty="0">
-                <a:latin typeface="Arial"/>
+                <a:latin typeface="Atkinson Hyperlegible Next"/>
                 <a:ea typeface="Arial"/>
                 <a:cs typeface="Arial"/>
                 <a:sym typeface="Arial"/>
@@ -23355,7 +23355,7 @@
             </a:r>
             <a:r>
               <a:rPr lang="en-US" sz="1800" dirty="0">
-                <a:latin typeface="Arial"/>
+                <a:latin typeface="Atkinson Hyperlegible Next"/>
                 <a:ea typeface="Arial"/>
                 <a:cs typeface="Arial"/>
                 <a:sym typeface="Arial"/>
@@ -23378,7 +23378,7 @@
                 <a:solidFill>
                   <a:schemeClr val="dk1"/>
                 </a:solidFill>
-                <a:latin typeface="Arial"/>
+                <a:latin typeface="Atkinson Hyperlegible Next"/>
                 <a:ea typeface="Arial"/>
                 <a:cs typeface="Arial"/>
                 <a:sym typeface="Arial"/>
@@ -23390,7 +23390,7 @@
                 <a:solidFill>
                   <a:schemeClr val="dk1"/>
                 </a:solidFill>
-                <a:latin typeface="Arial"/>
+                <a:latin typeface="Atkinson Hyperlegible Next"/>
                 <a:ea typeface="Arial"/>
                 <a:cs typeface="Arial"/>
                 <a:sym typeface="Arial"/>
@@ -23402,7 +23402,7 @@
                 <a:solidFill>
                   <a:schemeClr val="dk1"/>
                 </a:solidFill>
-                <a:latin typeface="Arial"/>
+                <a:latin typeface="Atkinson Hyperlegible Next"/>
                 <a:ea typeface="Arial"/>
                 <a:cs typeface="Arial"/>
                 <a:sym typeface="Arial"/>
@@ -23414,7 +23414,7 @@
                 <a:solidFill>
                   <a:schemeClr val="dk1"/>
                 </a:solidFill>
-                <a:latin typeface="Arial"/>
+                <a:latin typeface="Atkinson Hyperlegible Next"/>
                 <a:ea typeface="Arial"/>
                 <a:cs typeface="Arial"/>
                 <a:sym typeface="Arial"/>
@@ -23433,7 +23433,7 @@
               <a:buSzPts val="3000"/>
             </a:pPr>
             <a:endParaRPr lang="en-US" sz="1800" b="1" dirty="0">
-              <a:latin typeface="Arial"/>
+              <a:latin typeface="Atkinson Hyperlegible Next"/>
               <a:ea typeface="Arial"/>
               <a:cs typeface="Arial"/>
               <a:sym typeface="Arial"/>
@@ -23455,7 +23455,7 @@
                 <a:solidFill>
                   <a:srgbClr val="E84B36"/>
                 </a:solidFill>
-                <a:latin typeface="Arial"/>
+                <a:latin typeface="Atkinson Hyperlegible Next"/>
                 <a:ea typeface="Arial"/>
                 <a:cs typeface="Arial"/>
                 <a:sym typeface="Arial"/>
@@ -23464,7 +23464,7 @@
             </a:r>
             <a:r>
               <a:rPr lang="en-US" sz="1800" dirty="0">
-                <a:latin typeface="Arial"/>
+                <a:latin typeface="Atkinson Hyperlegible Next"/>
                 <a:ea typeface="Arial"/>
                 <a:cs typeface="Arial"/>
                 <a:sym typeface="Arial"/>
@@ -23475,7 +23475,7 @@
               <a:solidFill>
                 <a:srgbClr val="E84B36"/>
               </a:solidFill>
-              <a:latin typeface="Arial"/>
+              <a:latin typeface="Atkinson Hyperlegible Next"/>
               <a:ea typeface="Arial"/>
               <a:cs typeface="Arial"/>
               <a:sym typeface="Arial"/>
@@ -23496,7 +23496,7 @@
               <a:solidFill>
                 <a:srgbClr val="E84B36"/>
               </a:solidFill>
-              <a:latin typeface="Arial"/>
+              <a:latin typeface="Atkinson Hyperlegible Next"/>
               <a:ea typeface="Arial"/>
               <a:cs typeface="Arial"/>
               <a:sym typeface="Arial"/>
@@ -23518,7 +23518,7 @@
                 <a:solidFill>
                   <a:srgbClr val="E84B36"/>
                 </a:solidFill>
-                <a:latin typeface="Arial"/>
+                <a:latin typeface="Atkinson Hyperlegible Next"/>
                 <a:ea typeface="Arial"/>
                 <a:cs typeface="Arial"/>
                 <a:sym typeface="Arial"/>
@@ -23530,7 +23530,7 @@
                 <a:solidFill>
                   <a:srgbClr val="E84B36"/>
                 </a:solidFill>
-                <a:latin typeface="Arial"/>
+                <a:latin typeface="Atkinson Hyperlegible Next"/>
                 <a:ea typeface="Arial"/>
                 <a:cs typeface="Arial"/>
                 <a:sym typeface="Arial"/>
@@ -23550,7 +23550,7 @@
             </a:pPr>
             <a:r>
               <a:rPr lang="en-US" sz="1800" dirty="0">
-                <a:latin typeface="Arial"/>
+                <a:latin typeface="Atkinson Hyperlegible Next"/>
                 <a:ea typeface="Arial"/>
                 <a:cs typeface="Arial"/>
                 <a:sym typeface="Arial"/>
@@ -23558,7 +23558,7 @@
               <a:t>Check-offs for …</a:t>
             </a:r>
             <a:endParaRPr lang="en-US" sz="1800" b="1" dirty="0">
-              <a:latin typeface="Arial"/>
+              <a:latin typeface="Atkinson Hyperlegible Next"/>
               <a:ea typeface="Arial"/>
               <a:cs typeface="Arial"/>
               <a:sym typeface="Arial"/>
@@ -23620,7 +23620,7 @@
               <a:solidFill>
                 <a:srgbClr val="13294B"/>
               </a:solidFill>
-              <a:latin typeface="Calibri"/>
+              <a:latin typeface="Atkinson Hyperlegible Next"/>
               <a:ea typeface="Calibri"/>
               <a:cs typeface="Calibri"/>
               <a:sym typeface="Calibri"/>
@@ -23681,7 +23681,7 @@
                 <a:solidFill>
                   <a:schemeClr val="lt1"/>
                 </a:solidFill>
-                <a:latin typeface="Arial"/>
+                <a:latin typeface="Atkinson Hyperlegible Next"/>
                 <a:ea typeface="Arial"/>
                 <a:cs typeface="Arial"/>
                 <a:sym typeface="Arial"/>
@@ -23692,7 +23692,7 @@
               <a:solidFill>
                 <a:schemeClr val="lt1"/>
               </a:solidFill>
-              <a:latin typeface="Arial"/>
+              <a:latin typeface="Atkinson Hyperlegible Next"/>
               <a:ea typeface="Arial"/>
               <a:cs typeface="Arial"/>
               <a:sym typeface="Arial"/>
@@ -23781,7 +23781,7 @@
                 <a:solidFill>
                   <a:srgbClr val="13294B"/>
                 </a:solidFill>
-                <a:latin typeface="Arial"/>
+                <a:latin typeface="Atkinson Hyperlegible Next"/>
                 <a:ea typeface="Arial"/>
                 <a:cs typeface="Arial"/>
                 <a:sym typeface="Arial"/>
@@ -23948,7 +23948,7 @@
                 <a:solidFill>
                   <a:srgbClr val="13294B"/>
                 </a:solidFill>
-                <a:latin typeface="Arial"/>
+                <a:latin typeface="Atkinson Hyperlegible Next"/>
                 <a:ea typeface="Arial"/>
                 <a:cs typeface="Arial"/>
                 <a:sym typeface="Arial"/>
@@ -24079,7 +24079,7 @@
                   <a:solidFill>
                     <a:schemeClr val="lt1"/>
                   </a:solidFill>
-                  <a:latin typeface="Arial"/>
+                  <a:latin typeface="Atkinson Hyperlegible Next"/>
                   <a:ea typeface="Arial"/>
                   <a:cs typeface="Arial"/>
                   <a:sym typeface="Arial"/>
@@ -24090,7 +24090,7 @@
                 <a:solidFill>
                   <a:srgbClr val="000000"/>
                 </a:solidFill>
-                <a:latin typeface="Arial"/>
+                <a:latin typeface="Atkinson Hyperlegible Next"/>
                 <a:ea typeface="Arial"/>
                 <a:cs typeface="Arial"/>
                 <a:sym typeface="Arial"/>
@@ -24151,7 +24151,7 @@
                   <a:solidFill>
                     <a:schemeClr val="lt1"/>
                   </a:solidFill>
-                  <a:latin typeface="Arial"/>
+                  <a:latin typeface="Atkinson Hyperlegible Next"/>
                   <a:ea typeface="Arial"/>
                   <a:cs typeface="Arial"/>
                   <a:sym typeface="Arial"/>
@@ -24162,7 +24162,7 @@
                 <a:solidFill>
                   <a:schemeClr val="lt1"/>
                 </a:solidFill>
-                <a:latin typeface="Arial"/>
+                <a:latin typeface="Atkinson Hyperlegible Next"/>
                 <a:ea typeface="Arial"/>
                 <a:cs typeface="Arial"/>
                 <a:sym typeface="Arial"/>
@@ -24316,7 +24316,7 @@
                 <a:solidFill>
                   <a:schemeClr val="lt1"/>
                 </a:solidFill>
-                <a:latin typeface="Arial"/>
+                <a:latin typeface="Atkinson Hyperlegible Next"/>
                 <a:ea typeface="Arial"/>
                 <a:cs typeface="Arial"/>
                 <a:sym typeface="Arial"/>
@@ -24483,7 +24483,7 @@
                 <a:solidFill>
                   <a:schemeClr val="lt1"/>
                 </a:solidFill>
-                <a:latin typeface="Arial"/>
+                <a:latin typeface="Atkinson Hyperlegible Next"/>
                 <a:ea typeface="Arial"/>
                 <a:cs typeface="Arial"/>
                 <a:sym typeface="Arial"/>
@@ -24582,7 +24582,7 @@
                 <a:solidFill>
                   <a:srgbClr val="15264B"/>
                 </a:solidFill>
-                <a:latin typeface="Arial"/>
+                <a:latin typeface="Atkinson Hyperlegible Next"/>
                 <a:ea typeface="Arial"/>
                 <a:cs typeface="Arial"/>
                 <a:sym typeface="Arial"/>
@@ -24613,7 +24613,7 @@
               <a:solidFill>
                 <a:srgbClr val="15264B"/>
               </a:solidFill>
-              <a:latin typeface="Arial"/>
+              <a:latin typeface="Atkinson Hyperlegible Next"/>
               <a:ea typeface="Arial"/>
               <a:cs typeface="Arial"/>
               <a:sym typeface="Arial"/>
@@ -24637,7 +24637,7 @@
                 <a:solidFill>
                   <a:srgbClr val="15264B"/>
                 </a:solidFill>
-                <a:latin typeface="Arial"/>
+                <a:latin typeface="Atkinson Hyperlegible Next"/>
                 <a:ea typeface="Arial"/>
                 <a:cs typeface="Arial"/>
                 <a:sym typeface="Arial"/>
@@ -24648,7 +24648,7 @@
               <a:solidFill>
                 <a:srgbClr val="15264B"/>
               </a:solidFill>
-              <a:latin typeface="Arial"/>
+              <a:latin typeface="Atkinson Hyperlegible Next"/>
               <a:ea typeface="Arial"/>
               <a:cs typeface="Arial"/>
               <a:sym typeface="Arial"/>
@@ -24792,7 +24792,7 @@
                 <a:solidFill>
                   <a:srgbClr val="13294B"/>
                 </a:solidFill>
-                <a:latin typeface="Arial"/>
+                <a:latin typeface="Atkinson Hyperlegible Next"/>
                 <a:ea typeface="Arial"/>
                 <a:cs typeface="Arial"/>
                 <a:sym typeface="Arial"/>
@@ -24935,7 +24935,7 @@
                 <a:solidFill>
                   <a:srgbClr val="13294B"/>
                 </a:solidFill>
-                <a:latin typeface="Arial"/>
+                <a:latin typeface="Atkinson Hyperlegible Next"/>
                 <a:ea typeface="Arial"/>
                 <a:cs typeface="Arial"/>
                 <a:sym typeface="Arial"/>
@@ -25022,7 +25022,7 @@
             </a:pPr>
             <a:r>
               <a:rPr lang="en-US" sz="2400">
-                <a:latin typeface="Arial"/>
+                <a:latin typeface="Atkinson Hyperlegible Next"/>
                 <a:ea typeface="Arial"/>
                 <a:cs typeface="Arial"/>
                 <a:sym typeface="Arial"/>
@@ -25031,7 +25031,7 @@
             </a:r>
             <a:r>
               <a:rPr lang="en-US" sz="2400" dirty="0">
-                <a:latin typeface="Arial"/>
+                <a:latin typeface="Atkinson Hyperlegible Next"/>
                 <a:ea typeface="Arial"/>
                 <a:cs typeface="Arial"/>
                 <a:sym typeface="Arial"/>
@@ -25042,7 +25042,7 @@
               <a:solidFill>
                 <a:schemeClr val="dk1"/>
               </a:solidFill>
-              <a:latin typeface="Arial"/>
+              <a:latin typeface="Atkinson Hyperlegible Next"/>
               <a:ea typeface="Arial"/>
               <a:cs typeface="Arial"/>
               <a:sym typeface="Arial"/>
@@ -25104,7 +25104,7 @@
               <a:solidFill>
                 <a:srgbClr val="13294B"/>
               </a:solidFill>
-              <a:latin typeface="Calibri"/>
+              <a:latin typeface="Atkinson Hyperlegible Next"/>
               <a:ea typeface="Calibri"/>
               <a:cs typeface="Calibri"/>
               <a:sym typeface="Calibri"/>
@@ -25172,7 +25172,7 @@
               <a:solidFill>
                 <a:schemeClr val="lt1"/>
               </a:solidFill>
-              <a:latin typeface="Arial"/>
+              <a:latin typeface="Atkinson Hyperlegible Next"/>
               <a:ea typeface="Arial"/>
               <a:cs typeface="Arial"/>
               <a:sym typeface="Arial"/>
@@ -25261,7 +25261,7 @@
                 <a:solidFill>
                   <a:srgbClr val="13294B"/>
                 </a:solidFill>
-                <a:latin typeface="Arial"/>
+                <a:latin typeface="Atkinson Hyperlegible Next"/>
                 <a:ea typeface="Arial"/>
                 <a:cs typeface="Arial"/>
                 <a:sym typeface="Arial"/>
@@ -25428,7 +25428,7 @@
                 <a:solidFill>
                   <a:srgbClr val="13294B"/>
                 </a:solidFill>
-                <a:latin typeface="Arial"/>
+                <a:latin typeface="Atkinson Hyperlegible Next"/>
                 <a:ea typeface="Arial"/>
                 <a:cs typeface="Arial"/>
                 <a:sym typeface="Arial"/>
@@ -25514,7 +25514,7 @@
                 <a:solidFill>
                   <a:srgbClr val="E84B36"/>
                 </a:solidFill>
-                <a:latin typeface="Arial"/>
+                <a:latin typeface="Atkinson Hyperlegible Next"/>
                 <a:ea typeface="Arial"/>
                 <a:cs typeface="Arial"/>
                 <a:sym typeface="Arial"/>
@@ -25525,7 +25525,7 @@
               <a:solidFill>
                 <a:srgbClr val="E84B36"/>
               </a:solidFill>
-              <a:latin typeface="Arial"/>
+              <a:latin typeface="Atkinson Hyperlegible Next"/>
               <a:ea typeface="Arial"/>
               <a:cs typeface="Arial"/>
               <a:sym typeface="Arial"/>
@@ -25549,7 +25549,7 @@
               <a:solidFill>
                 <a:schemeClr val="dk1"/>
               </a:solidFill>
-              <a:latin typeface="Arial"/>
+              <a:latin typeface="Atkinson Hyperlegible Next"/>
               <a:ea typeface="Arial"/>
               <a:cs typeface="Arial"/>
               <a:sym typeface="Arial"/>
@@ -25571,7 +25571,7 @@
             </a:pPr>
             <a:r>
               <a:rPr lang="en-US" sz="1800">
-                <a:latin typeface="Arial"/>
+                <a:latin typeface="Atkinson Hyperlegible Next"/>
                 <a:ea typeface="Arial"/>
                 <a:cs typeface="Arial"/>
                 <a:sym typeface="Arial"/>
@@ -25598,7 +25598,7 @@
               <a:solidFill>
                 <a:schemeClr val="dk1"/>
               </a:solidFill>
-              <a:latin typeface="Arial"/>
+              <a:latin typeface="Atkinson Hyperlegible Next"/>
               <a:ea typeface="Arial"/>
               <a:cs typeface="Arial"/>
               <a:sym typeface="Arial"/>
@@ -25623,7 +25623,7 @@
                 <a:solidFill>
                   <a:srgbClr val="15264B"/>
                 </a:solidFill>
-                <a:latin typeface="Arial"/>
+                <a:latin typeface="Atkinson Hyperlegible Next"/>
                 <a:ea typeface="Arial"/>
                 <a:cs typeface="Arial"/>
                 <a:sym typeface="Arial"/>
@@ -25634,7 +25634,7 @@
               <a:solidFill>
                 <a:srgbClr val="15264B"/>
               </a:solidFill>
-              <a:latin typeface="Arial"/>
+              <a:latin typeface="Atkinson Hyperlegible Next"/>
               <a:ea typeface="Arial"/>
               <a:cs typeface="Arial"/>
               <a:sym typeface="Arial"/>
@@ -25658,7 +25658,7 @@
               <a:solidFill>
                 <a:schemeClr val="dk1"/>
               </a:solidFill>
-              <a:latin typeface="Arial"/>
+              <a:latin typeface="Atkinson Hyperlegible Next"/>
               <a:ea typeface="Arial"/>
               <a:cs typeface="Arial"/>
               <a:sym typeface="Arial"/>
@@ -25680,7 +25680,7 @@
             </a:pPr>
             <a:r>
               <a:rPr lang="en-US" sz="1800">
-                <a:latin typeface="Arial"/>
+                <a:latin typeface="Atkinson Hyperlegible Next"/>
                 <a:ea typeface="Arial"/>
                 <a:cs typeface="Arial"/>
                 <a:sym typeface="Arial"/>
@@ -25691,7 +25691,7 @@
               <a:solidFill>
                 <a:schemeClr val="dk1"/>
               </a:solidFill>
-              <a:latin typeface="Arial"/>
+              <a:latin typeface="Atkinson Hyperlegible Next"/>
               <a:ea typeface="Arial"/>
               <a:cs typeface="Arial"/>
               <a:sym typeface="Arial"/>
@@ -25747,7 +25747,7 @@
               <a:solidFill>
                 <a:srgbClr val="13294B"/>
               </a:solidFill>
-              <a:latin typeface="Calibri"/>
+              <a:latin typeface="Atkinson Hyperlegible Next"/>
               <a:ea typeface="Calibri"/>
               <a:cs typeface="Calibri"/>
               <a:sym typeface="Calibri"/>
@@ -25802,7 +25802,7 @@
                 <a:solidFill>
                   <a:schemeClr val="lt1"/>
                 </a:solidFill>
-                <a:latin typeface="Arial"/>
+                <a:latin typeface="Atkinson Hyperlegible Next"/>
                 <a:ea typeface="Arial"/>
                 <a:cs typeface="Arial"/>
                 <a:sym typeface="Arial"/>
@@ -25813,7 +25813,7 @@
               <a:solidFill>
                 <a:schemeClr val="lt1"/>
               </a:solidFill>
-              <a:latin typeface="Arial"/>
+              <a:latin typeface="Atkinson Hyperlegible Next"/>
               <a:ea typeface="Arial"/>
               <a:cs typeface="Arial"/>
               <a:sym typeface="Arial"/>
@@ -25890,7 +25890,7 @@
                 <a:solidFill>
                   <a:srgbClr val="13294B"/>
                 </a:solidFill>
-                <a:latin typeface="Arial"/>
+                <a:latin typeface="Atkinson Hyperlegible Next"/>
                 <a:ea typeface="Arial"/>
                 <a:cs typeface="Arial"/>
                 <a:sym typeface="Arial"/>
@@ -26033,7 +26033,7 @@
                 <a:solidFill>
                   <a:srgbClr val="13294B"/>
                 </a:solidFill>
-                <a:latin typeface="Arial"/>
+                <a:latin typeface="Atkinson Hyperlegible Next"/>
                 <a:ea typeface="Arial"/>
                 <a:cs typeface="Arial"/>
                 <a:sym typeface="Arial"/>
@@ -26115,7 +26115,7 @@
               <a:solidFill>
                 <a:srgbClr val="13294B"/>
               </a:solidFill>
-              <a:latin typeface="Calibri"/>
+              <a:latin typeface="Atkinson Hyperlegible Next"/>
               <a:ea typeface="Calibri"/>
               <a:cs typeface="Calibri"/>
               <a:sym typeface="Calibri"/>
@@ -26165,7 +26165,7 @@
                 <a:solidFill>
                   <a:srgbClr val="E84B36"/>
                 </a:solidFill>
-                <a:latin typeface="Arial"/>
+                <a:latin typeface="Atkinson Hyperlegible Next"/>
                 <a:ea typeface="Arial"/>
                 <a:cs typeface="Arial"/>
                 <a:sym typeface="Arial"/>
@@ -26176,7 +26176,7 @@
               <a:solidFill>
                 <a:srgbClr val="E84B36"/>
               </a:solidFill>
-              <a:latin typeface="Arial"/>
+              <a:latin typeface="Atkinson Hyperlegible Next"/>
               <a:ea typeface="Arial"/>
               <a:cs typeface="Arial"/>
               <a:sym typeface="Arial"/>
@@ -26199,7 +26199,7 @@
               <a:solidFill>
                 <a:schemeClr val="dk1"/>
               </a:solidFill>
-              <a:latin typeface="Arial"/>
+              <a:latin typeface="Atkinson Hyperlegible Next"/>
               <a:ea typeface="Arial"/>
               <a:cs typeface="Arial"/>
               <a:sym typeface="Arial"/>
@@ -26223,7 +26223,7 @@
                 <a:solidFill>
                   <a:srgbClr val="000000"/>
                 </a:solidFill>
-                <a:latin typeface="Arial"/>
+                <a:latin typeface="Atkinson Hyperlegible Next"/>
                 <a:ea typeface="Arial"/>
                 <a:cs typeface="Arial"/>
                 <a:sym typeface="Arial"/>
@@ -26234,7 +26234,7 @@
               <a:solidFill>
                 <a:schemeClr val="dk1"/>
               </a:solidFill>
-              <a:latin typeface="Arial"/>
+              <a:latin typeface="Atkinson Hyperlegible Next"/>
               <a:ea typeface="Arial"/>
               <a:cs typeface="Arial"/>
               <a:sym typeface="Arial"/>
@@ -26284,7 +26284,7 @@
                 <a:solidFill>
                   <a:srgbClr val="15264B"/>
                 </a:solidFill>
-                <a:latin typeface="Arial"/>
+                <a:latin typeface="Atkinson Hyperlegible Next"/>
                 <a:ea typeface="Arial"/>
                 <a:cs typeface="Arial"/>
                 <a:sym typeface="Arial"/>
@@ -26295,7 +26295,7 @@
               <a:solidFill>
                 <a:srgbClr val="15264B"/>
               </a:solidFill>
-              <a:latin typeface="Arial"/>
+              <a:latin typeface="Atkinson Hyperlegible Next"/>
               <a:ea typeface="Arial"/>
               <a:cs typeface="Arial"/>
               <a:sym typeface="Arial"/>
@@ -26318,7 +26318,7 @@
               <a:solidFill>
                 <a:schemeClr val="dk1"/>
               </a:solidFill>
-              <a:latin typeface="Arial"/>
+              <a:latin typeface="Atkinson Hyperlegible Next"/>
               <a:ea typeface="Arial"/>
               <a:cs typeface="Arial"/>
               <a:sym typeface="Arial"/>
@@ -26342,7 +26342,7 @@
                 <a:solidFill>
                   <a:srgbClr val="000000"/>
                 </a:solidFill>
-                <a:latin typeface="Arial"/>
+                <a:latin typeface="Atkinson Hyperlegible Next"/>
                 <a:ea typeface="Arial"/>
                 <a:cs typeface="Arial"/>
                 <a:sym typeface="Arial"/>
@@ -26353,7 +26353,7 @@
               <a:solidFill>
                 <a:schemeClr val="dk1"/>
               </a:solidFill>
-              <a:latin typeface="Arial"/>
+              <a:latin typeface="Atkinson Hyperlegible Next"/>
               <a:ea typeface="Arial"/>
               <a:cs typeface="Arial"/>
               <a:sym typeface="Arial"/>
@@ -26408,7 +26408,7 @@
                 <a:solidFill>
                   <a:schemeClr val="lt1"/>
                 </a:solidFill>
-                <a:latin typeface="Arial"/>
+                <a:latin typeface="Atkinson Hyperlegible Next"/>
                 <a:ea typeface="Arial"/>
                 <a:cs typeface="Arial"/>
                 <a:sym typeface="Arial"/>
@@ -26419,7 +26419,7 @@
               <a:solidFill>
                 <a:schemeClr val="lt1"/>
               </a:solidFill>
-              <a:latin typeface="Arial"/>
+              <a:latin typeface="Atkinson Hyperlegible Next"/>
               <a:ea typeface="Arial"/>
               <a:cs typeface="Arial"/>
               <a:sym typeface="Arial"/>
@@ -26496,7 +26496,7 @@
                 <a:solidFill>
                   <a:srgbClr val="13294B"/>
                 </a:solidFill>
-                <a:latin typeface="Arial"/>
+                <a:latin typeface="Atkinson Hyperlegible Next"/>
                 <a:ea typeface="Arial"/>
                 <a:cs typeface="Arial"/>
                 <a:sym typeface="Arial"/>
@@ -26639,7 +26639,7 @@
                 <a:solidFill>
                   <a:srgbClr val="13294B"/>
                 </a:solidFill>
-                <a:latin typeface="Arial"/>
+                <a:latin typeface="Atkinson Hyperlegible Next"/>
                 <a:ea typeface="Arial"/>
                 <a:cs typeface="Arial"/>
                 <a:sym typeface="Arial"/>
@@ -26721,7 +26721,7 @@
               <a:solidFill>
                 <a:schemeClr val="lt1"/>
               </a:solidFill>
-              <a:latin typeface="Calibri"/>
+              <a:latin typeface="Atkinson Hyperlegible Next"/>
               <a:ea typeface="Calibri"/>
               <a:cs typeface="Calibri"/>
               <a:sym typeface="Calibri"/>
@@ -26776,7 +26776,7 @@
                 <a:solidFill>
                   <a:srgbClr val="A5A5A5"/>
                 </a:solidFill>
-                <a:latin typeface="Arial"/>
+                <a:latin typeface="Atkinson Hyperlegible Next"/>
                 <a:ea typeface="Arial"/>
                 <a:cs typeface="Arial"/>
                 <a:sym typeface="Arial"/>
@@ -26787,7 +26787,7 @@
               <a:solidFill>
                 <a:srgbClr val="000000"/>
               </a:solidFill>
-              <a:latin typeface="Arial"/>
+              <a:latin typeface="Atkinson Hyperlegible Next"/>
               <a:ea typeface="Arial"/>
               <a:cs typeface="Arial"/>
               <a:sym typeface="Arial"/>
@@ -26843,7 +26843,7 @@
               <a:solidFill>
                 <a:schemeClr val="lt1"/>
               </a:solidFill>
-              <a:latin typeface="Calibri"/>
+              <a:latin typeface="Atkinson Hyperlegible Next"/>
               <a:ea typeface="Calibri"/>
               <a:cs typeface="Calibri"/>
               <a:sym typeface="Calibri"/>
@@ -26898,7 +26898,7 @@
                 <a:solidFill>
                   <a:srgbClr val="A5A5A5"/>
                 </a:solidFill>
-                <a:latin typeface="Arial"/>
+                <a:latin typeface="Atkinson Hyperlegible Next"/>
                 <a:ea typeface="Arial"/>
                 <a:cs typeface="Arial"/>
                 <a:sym typeface="Arial"/>
@@ -26909,7 +26909,7 @@
               <a:solidFill>
                 <a:srgbClr val="000000"/>
               </a:solidFill>
-              <a:latin typeface="Arial"/>
+              <a:latin typeface="Atkinson Hyperlegible Next"/>
               <a:ea typeface="Arial"/>
               <a:cs typeface="Arial"/>
               <a:sym typeface="Arial"/>
@@ -26959,7 +26959,7 @@
                 <a:solidFill>
                   <a:srgbClr val="E84B36"/>
                 </a:solidFill>
-                <a:latin typeface="Arial"/>
+                <a:latin typeface="Atkinson Hyperlegible Next"/>
                 <a:ea typeface="Arial"/>
                 <a:cs typeface="Arial"/>
                 <a:sym typeface="Arial"/>
@@ -26970,7 +26970,7 @@
               <a:solidFill>
                 <a:srgbClr val="E84B36"/>
               </a:solidFill>
-              <a:latin typeface="Arial"/>
+              <a:latin typeface="Atkinson Hyperlegible Next"/>
               <a:ea typeface="Arial"/>
               <a:cs typeface="Arial"/>
               <a:sym typeface="Arial"/>
@@ -26993,7 +26993,7 @@
               <a:solidFill>
                 <a:schemeClr val="dk1"/>
               </a:solidFill>
-              <a:latin typeface="Arial"/>
+              <a:latin typeface="Atkinson Hyperlegible Next"/>
               <a:ea typeface="Arial"/>
               <a:cs typeface="Arial"/>
               <a:sym typeface="Arial"/>
@@ -27017,7 +27017,7 @@
                 <a:solidFill>
                   <a:srgbClr val="000000"/>
                 </a:solidFill>
-                <a:latin typeface="Arial"/>
+                <a:latin typeface="Atkinson Hyperlegible Next"/>
                 <a:ea typeface="Arial"/>
                 <a:cs typeface="Arial"/>
                 <a:sym typeface="Arial"/>
@@ -27043,7 +27043,7 @@
               <a:solidFill>
                 <a:schemeClr val="dk1"/>
               </a:solidFill>
-              <a:latin typeface="Arial"/>
+              <a:latin typeface="Atkinson Hyperlegible Next"/>
               <a:ea typeface="Arial"/>
               <a:cs typeface="Arial"/>
               <a:sym typeface="Arial"/>
@@ -27067,7 +27067,7 @@
                 <a:solidFill>
                   <a:srgbClr val="15264B"/>
                 </a:solidFill>
-                <a:latin typeface="Arial"/>
+                <a:latin typeface="Atkinson Hyperlegible Next"/>
                 <a:ea typeface="Arial"/>
                 <a:cs typeface="Arial"/>
                 <a:sym typeface="Arial"/>
@@ -27078,7 +27078,7 @@
               <a:solidFill>
                 <a:srgbClr val="15264B"/>
               </a:solidFill>
-              <a:latin typeface="Arial"/>
+              <a:latin typeface="Atkinson Hyperlegible Next"/>
               <a:ea typeface="Arial"/>
               <a:cs typeface="Arial"/>
               <a:sym typeface="Arial"/>
@@ -27101,7 +27101,7 @@
               <a:solidFill>
                 <a:schemeClr val="dk1"/>
               </a:solidFill>
-              <a:latin typeface="Arial"/>
+              <a:latin typeface="Atkinson Hyperlegible Next"/>
               <a:ea typeface="Arial"/>
               <a:cs typeface="Arial"/>
               <a:sym typeface="Arial"/>
@@ -27125,7 +27125,7 @@
                 <a:solidFill>
                   <a:srgbClr val="000000"/>
                 </a:solidFill>
-                <a:latin typeface="Arial"/>
+                <a:latin typeface="Atkinson Hyperlegible Next"/>
                 <a:ea typeface="Arial"/>
                 <a:cs typeface="Arial"/>
                 <a:sym typeface="Arial"/>
@@ -27136,7 +27136,7 @@
               <a:solidFill>
                 <a:schemeClr val="dk1"/>
               </a:solidFill>
-              <a:latin typeface="Arial"/>
+              <a:latin typeface="Atkinson Hyperlegible Next"/>
               <a:ea typeface="Arial"/>
               <a:cs typeface="Arial"/>
               <a:sym typeface="Arial"/>
@@ -27192,7 +27192,7 @@
               <a:solidFill>
                 <a:srgbClr val="13294B"/>
               </a:solidFill>
-              <a:latin typeface="Calibri"/>
+              <a:latin typeface="Atkinson Hyperlegible Next"/>
               <a:ea typeface="Calibri"/>
               <a:cs typeface="Calibri"/>
               <a:sym typeface="Calibri"/>
@@ -27247,7 +27247,7 @@
                 <a:solidFill>
                   <a:schemeClr val="lt1"/>
                 </a:solidFill>
-                <a:latin typeface="Arial"/>
+                <a:latin typeface="Atkinson Hyperlegible Next"/>
                 <a:ea typeface="Arial"/>
                 <a:cs typeface="Arial"/>
                 <a:sym typeface="Arial"/>
@@ -27258,7 +27258,7 @@
               <a:solidFill>
                 <a:schemeClr val="lt1"/>
               </a:solidFill>
-              <a:latin typeface="Arial"/>
+              <a:latin typeface="Atkinson Hyperlegible Next"/>
               <a:ea typeface="Arial"/>
               <a:cs typeface="Arial"/>
               <a:sym typeface="Arial"/>
@@ -27335,7 +27335,7 @@
                 <a:solidFill>
                   <a:srgbClr val="13294B"/>
                 </a:solidFill>
-                <a:latin typeface="Arial"/>
+                <a:latin typeface="Atkinson Hyperlegible Next"/>
                 <a:ea typeface="Arial"/>
                 <a:cs typeface="Arial"/>
                 <a:sym typeface="Arial"/>
@@ -27478,7 +27478,7 @@
                 <a:solidFill>
                   <a:srgbClr val="13294B"/>
                 </a:solidFill>
-                <a:latin typeface="Arial"/>
+                <a:latin typeface="Atkinson Hyperlegible Next"/>
                 <a:ea typeface="Arial"/>
                 <a:cs typeface="Arial"/>
                 <a:sym typeface="Arial"/>
@@ -27538,7 +27538,7 @@
     </a:clrScheme>
     <a:fontScheme name="Office">
       <a:majorFont>
-        <a:latin typeface="Arial"/>
+        <a:latin typeface="Atkinson Hyperlegible Next"/>
         <a:ea typeface=""/>
         <a:cs typeface=""/>
         <a:font script="Jpan" typeface="ＭＳ Ｐゴシック"/>
@@ -27573,7 +27573,7 @@
         <a:font script="Geor" typeface="Sylfaen"/>
       </a:majorFont>
       <a:minorFont>
-        <a:latin typeface="Arial"/>
+        <a:latin typeface="Atkinson Hyperlegible Next"/>
         <a:ea typeface=""/>
         <a:cs typeface=""/>
         <a:font script="Jpan" typeface="ＭＳ Ｐゴシック"/>
@@ -27819,7 +27819,7 @@
     </a:clrScheme>
     <a:fontScheme name="Office">
       <a:majorFont>
-        <a:latin typeface="Arial"/>
+        <a:latin typeface="Atkinson Hyperlegible Next"/>
         <a:ea typeface=""/>
         <a:cs typeface=""/>
         <a:font script="Jpan" typeface="ＭＳ Ｐゴシック"/>
@@ -27854,7 +27854,7 @@
         <a:font script="Geor" typeface="Sylfaen"/>
       </a:majorFont>
       <a:minorFont>
-        <a:latin typeface="Arial"/>
+        <a:latin typeface="Atkinson Hyperlegible Next"/>
         <a:ea typeface=""/>
         <a:cs typeface=""/>
         <a:font script="Jpan" typeface="ＭＳ Ｐゴシック"/>

--- a/Lectures/Slides/SE-Deck-Template.pptx
+++ b/Lectures/Slides/SE-Deck-Template.pptx
@@ -16367,8 +16367,10 @@
       <p:sp>
         <p:nvSpPr>
           <p:cNvPr id="82" name="Google Shape;82;p26"/>
-          <p:cNvSpPr txBox="1"/>
-          <p:nvPr/>
+          <p:cNvSpPr/>
+          <p:nvPr>
+            <p:ph type="title"/>
+          </p:nvPr>
         </p:nvSpPr>
         <p:spPr>
           <a:xfrm>
@@ -16390,20 +16392,30 @@
           <a:lstStyle/>
           <a:p>
             <a:pPr lvl="0" algn="ctr">
+              <a:lnSpc>
+                <a:spcPct val="100000"/>
+              </a:lnSpc>
               <a:spcBef>
                 <a:spcPts val="600"/>
               </a:spcBef>
+              <a:spcAft>
+                <a:spcPts val="0"/>
+              </a:spcAft>
               <a:buSzPts val="4500"/>
             </a:pPr>
             <a:r>
-              <a:rPr lang="en-US" sz="4500" b="1" dirty="0">
+              <a:rPr i="0" lang="en-US" sz="4500" b="1" dirty="0">
                 <a:solidFill>
                   <a:schemeClr val="lt1"/>
                 </a:solidFill>
               </a:rPr>
               <a:t>SE 423: Introduction to Mechatronics</a:t>
             </a:r>
-            <a:endParaRPr lang="en-US" sz="4500" dirty="0"/>
+            <a:endParaRPr i="0" b="0" lang="en-US" sz="4500" dirty="0">
+              <a:solidFill>
+                <a:srgbClr val="000000"/>
+              </a:solidFill>
+            </a:endParaRPr>
           </a:p>
           <a:p>
             <a:pPr marL="0" marR="0" lvl="0" indent="0" algn="ctr" rtl="0">
@@ -16419,14 +16431,18 @@
               <a:buNone/>
             </a:pPr>
             <a:r>
-              <a:rPr lang="en-US" sz="2500" dirty="0">
+              <a:rPr i="0" b="0" lang="en-US" sz="2500" dirty="0">
                 <a:solidFill>
                   <a:schemeClr val="lt1"/>
                 </a:solidFill>
               </a:rPr>
               <a:t>Lecture X</a:t>
             </a:r>
-            <a:endParaRPr dirty="0"/>
+            <a:endParaRPr i="0" b="0" sz="1400" dirty="0">
+              <a:solidFill>
+                <a:srgbClr val="000000"/>
+              </a:solidFill>
+            </a:endParaRPr>
           </a:p>
           <a:p>
             <a:pPr marL="0" marR="0" lvl="0" indent="0" algn="ctr" rtl="0">
@@ -17137,8 +17153,10 @@
       <p:sp>
         <p:nvSpPr>
           <p:cNvPr id="168" name="Google Shape;168;p7"/>
-          <p:cNvSpPr txBox="1"/>
-          <p:nvPr/>
+          <p:cNvSpPr/>
+          <p:nvPr>
+            <p:ph type="title"/>
+          </p:nvPr>
         </p:nvSpPr>
         <p:spPr>
           <a:xfrm>
@@ -17854,8 +17872,10 @@
       <p:sp>
         <p:nvSpPr>
           <p:cNvPr id="183" name="Google Shape;183;p32"/>
-          <p:cNvSpPr txBox="1"/>
-          <p:nvPr/>
+          <p:cNvSpPr/>
+          <p:nvPr>
+            <p:ph type="title"/>
+          </p:nvPr>
         </p:nvSpPr>
         <p:spPr>
           <a:xfrm>
@@ -18571,8 +18591,10 @@
       <p:sp>
         <p:nvSpPr>
           <p:cNvPr id="198" name="Google Shape;198;p33"/>
-          <p:cNvSpPr txBox="1"/>
-          <p:nvPr/>
+          <p:cNvSpPr/>
+          <p:nvPr>
+            <p:ph type="title"/>
+          </p:nvPr>
         </p:nvSpPr>
         <p:spPr>
           <a:xfrm>
@@ -19127,8 +19149,10 @@
       <p:sp>
         <p:nvSpPr>
           <p:cNvPr id="213" name="Google Shape;213;p8"/>
-          <p:cNvSpPr txBox="1"/>
-          <p:nvPr/>
+          <p:cNvSpPr/>
+          <p:nvPr>
+            <p:ph type="title"/>
+          </p:nvPr>
         </p:nvSpPr>
         <p:spPr>
           <a:xfrm>
@@ -19561,8 +19585,10 @@
       <p:sp>
         <p:nvSpPr>
           <p:cNvPr id="226" name="Google Shape;226;p34"/>
-          <p:cNvSpPr txBox="1"/>
-          <p:nvPr/>
+          <p:cNvSpPr/>
+          <p:nvPr>
+            <p:ph type="title"/>
+          </p:nvPr>
         </p:nvSpPr>
         <p:spPr>
           <a:xfrm>
@@ -19612,7 +19638,11 @@
               </a:rPr>
               <a:t>(Text here relevant to the photo for a larger call out on a given idea or message.) </a:t>
             </a:r>
-            <a:endParaRPr/>
+            <a:endParaRPr i="0" b="0" sz="1400">
+              <a:solidFill>
+                <a:srgbClr val="000000"/>
+              </a:solidFill>
+            </a:endParaRPr>
           </a:p>
           <a:p>
             <a:pPr marL="0" marR="0" lvl="0" indent="0" algn="ctr" rtl="0">
@@ -20591,8 +20621,10 @@
       <p:sp>
         <p:nvSpPr>
           <p:cNvPr id="252" name="Google Shape;252;p36"/>
-          <p:cNvSpPr txBox="1"/>
-          <p:nvPr/>
+          <p:cNvSpPr/>
+          <p:nvPr>
+            <p:ph type="title"/>
+          </p:nvPr>
         </p:nvSpPr>
         <p:spPr>
           <a:xfrm>
@@ -21095,8 +21127,10 @@
       <p:sp>
         <p:nvSpPr>
           <p:cNvPr id="264" name="Google Shape;264;p37"/>
-          <p:cNvSpPr txBox="1"/>
-          <p:nvPr/>
+          <p:cNvSpPr/>
+          <p:nvPr>
+            <p:ph type="title"/>
+          </p:nvPr>
         </p:nvSpPr>
         <p:spPr>
           <a:xfrm>
@@ -21199,7 +21233,11 @@
               </a:rPr>
               <a:t>Summary</a:t>
             </a:r>
-            <a:endParaRPr/>
+            <a:endParaRPr i="0" b="0" sz="1400">
+              <a:solidFill>
+                <a:srgbClr val="000000"/>
+              </a:solidFill>
+            </a:endParaRPr>
           </a:p>
           <a:p>
             <a:pPr marL="0" marR="0" lvl="0" indent="0" algn="l" rtl="0">
@@ -21226,7 +21264,11 @@
               </a:rPr>
               <a:t>Thank You</a:t>
             </a:r>
-            <a:endParaRPr/>
+            <a:endParaRPr i="0" b="0" sz="1400">
+              <a:solidFill>
+                <a:srgbClr val="000000"/>
+              </a:solidFill>
+            </a:endParaRPr>
           </a:p>
           <a:p>
             <a:pPr marL="0" marR="0" lvl="0" indent="0" algn="l" rtl="0">
@@ -21253,7 +21295,11 @@
               </a:rPr>
               <a:t>Questions</a:t>
             </a:r>
-            <a:endParaRPr/>
+            <a:endParaRPr i="0" b="0" sz="1400">
+              <a:solidFill>
+                <a:srgbClr val="000000"/>
+              </a:solidFill>
+            </a:endParaRPr>
           </a:p>
           <a:p>
             <a:pPr marL="0" marR="0" lvl="0" indent="0" algn="l" rtl="0">
@@ -21280,7 +21326,11 @@
               </a:rPr>
               <a:t>Contact Information</a:t>
             </a:r>
-            <a:endParaRPr/>
+            <a:endParaRPr i="0" b="0" sz="1400">
+              <a:solidFill>
+                <a:srgbClr val="000000"/>
+              </a:solidFill>
+            </a:endParaRPr>
           </a:p>
           <a:p>
             <a:pPr marL="0" marR="0" lvl="0" indent="0" algn="l" rtl="0">
@@ -21627,8 +21677,10 @@
       <p:sp>
         <p:nvSpPr>
           <p:cNvPr id="89" name="Google Shape;89;p27"/>
-          <p:cNvSpPr txBox="1"/>
-          <p:nvPr/>
+          <p:cNvSpPr/>
+          <p:nvPr>
+            <p:ph type="title"/>
+          </p:nvPr>
         </p:nvSpPr>
         <p:spPr>
           <a:xfrm>
@@ -22161,8 +22213,10 @@
               </a:ext>
             </a:extLst>
           </p:cNvPr>
-          <p:cNvSpPr txBox="1"/>
-          <p:nvPr/>
+          <p:cNvSpPr/>
+          <p:nvPr>
+            <p:ph type="title"/>
+          </p:nvPr>
         </p:nvSpPr>
         <p:spPr>
           <a:xfrm>
@@ -22183,9 +22237,19 @@
           </a:bodyPr>
           <a:lstStyle/>
           <a:p>
-            <a:pPr lvl="0" algn="ctr"/>
+            <a:pPr lvl="0" algn="ctr">
+              <a:lnSpc>
+                <a:spcPct val="100000"/>
+              </a:lnSpc>
+              <a:spcBef>
+                <a:spcPts val="0"/>
+              </a:spcBef>
+              <a:spcAft>
+                <a:spcPts val="0"/>
+              </a:spcAft>
+            </a:pPr>
             <a:r>
-              <a:rPr lang="en-US" sz="6600" b="1" dirty="0">
+              <a:rPr i="0" lang="en-US" sz="6600" b="1" dirty="0">
                 <a:solidFill>
                   <a:schemeClr val="lt1"/>
                 </a:solidFill>
@@ -22193,7 +22257,7 @@
               <a:t>Questions</a:t>
             </a:r>
             <a:r>
-              <a:rPr lang="en-US" sz="5400" b="1" dirty="0">
+              <a:rPr i="0" lang="en-US" sz="5400" b="1" dirty="0">
                 <a:solidFill>
                   <a:schemeClr val="lt1"/>
                 </a:solidFill>
@@ -22716,8 +22780,10 @@
               </a:ext>
             </a:extLst>
           </p:cNvPr>
-          <p:cNvSpPr txBox="1"/>
-          <p:nvPr/>
+          <p:cNvSpPr/>
+          <p:nvPr>
+            <p:ph type="title"/>
+          </p:nvPr>
         </p:nvSpPr>
         <p:spPr>
           <a:xfrm>
@@ -23079,6 +23145,33 @@
           <a:chExt cx="0" cy="0"/>
         </a:xfrm>
       </p:grpSpPr>
+      <p:sp>
+        <p:nvSpPr>
+          <p:cNvPr id="276" name="Title 276"/>
+          <p:cNvSpPr>
+            <a:spLocks noGrp="1"/>
+          </p:cNvSpPr>
+          <p:nvPr>
+            <p:ph type="title"/>
+          </p:nvPr>
+        </p:nvSpPr>
+        <p:spPr>
+          <a:xfrm>
+            <a:off x="0" y="-914400"/>
+            <a:ext cx="12192000" cy="685800"/>
+          </a:xfrm>
+        </p:spPr>
+        <p:txBody>
+          <a:bodyPr/>
+          <a:lstStyle/>
+          <a:p>
+            <a:r>
+              <a:rPr lang="en-US" dirty="0"/>
+              <a:t>End of this lecture</a:t>
+            </a:r>
+          </a:p>
+        </p:txBody>
+      </p:sp>
       <p:pic>
         <p:nvPicPr>
           <p:cNvPr id="275" name="Google Shape;275;p38"/>
@@ -23637,8 +23730,10 @@
               </a:ext>
             </a:extLst>
           </p:cNvPr>
-          <p:cNvSpPr txBox="1"/>
-          <p:nvPr/>
+          <p:cNvSpPr/>
+          <p:nvPr>
+            <p:ph type="title"/>
+          </p:nvPr>
         </p:nvSpPr>
         <p:spPr>
           <a:xfrm>
@@ -24035,8 +24130,10 @@
                 </a:ext>
               </a:extLst>
             </p:cNvPr>
-            <p:cNvSpPr txBox="1"/>
-            <p:nvPr/>
+            <p:cNvSpPr/>
+            <p:nvPr>
+              <p:ph type="title"/>
+            </p:nvPr>
           </p:nvSpPr>
           <p:spPr>
             <a:xfrm>
@@ -24538,8 +24635,10 @@
       <p:sp>
         <p:nvSpPr>
           <p:cNvPr id="104" name="Google Shape;104;p28"/>
-          <p:cNvSpPr txBox="1"/>
-          <p:nvPr/>
+          <p:cNvSpPr/>
+          <p:nvPr>
+            <p:ph type="title"/>
+          </p:nvPr>
         </p:nvSpPr>
         <p:spPr>
           <a:xfrm>
@@ -24589,7 +24688,11 @@
               </a:rPr>
               <a:t>Heading</a:t>
             </a:r>
-            <a:endParaRPr/>
+            <a:endParaRPr i="0" b="0" sz="1400">
+              <a:solidFill>
+                <a:srgbClr val="000000"/>
+              </a:solidFill>
+            </a:endParaRPr>
           </a:p>
           <a:p>
             <a:pPr marL="0" marR="0" lvl="0" indent="0" algn="ctr" rtl="0">
@@ -25121,8 +25224,10 @@
               </a:ext>
             </a:extLst>
           </p:cNvPr>
-          <p:cNvSpPr txBox="1"/>
-          <p:nvPr/>
+          <p:cNvSpPr/>
+          <p:nvPr>
+            <p:ph type="title"/>
+          </p:nvPr>
         </p:nvSpPr>
         <p:spPr>
           <a:xfrm>
@@ -25161,7 +25266,7 @@
               <a:buNone/>
             </a:pPr>
             <a:r>
-              <a:rPr lang="en-US" sz="2400" dirty="0">
+              <a:rPr i="0" b="0" lang="en-US" sz="2400" dirty="0">
                 <a:solidFill>
                   <a:schemeClr val="lt1"/>
                 </a:solidFill>
@@ -25758,8 +25863,10 @@
       <p:sp>
         <p:nvSpPr>
           <p:cNvPr id="120" name="Google Shape;120;p29"/>
-          <p:cNvSpPr txBox="1"/>
-          <p:nvPr/>
+          <p:cNvSpPr/>
+          <p:nvPr>
+            <p:ph type="title"/>
+          </p:nvPr>
         </p:nvSpPr>
         <p:spPr>
           <a:xfrm>
@@ -26364,8 +26471,10 @@
       <p:sp>
         <p:nvSpPr>
           <p:cNvPr id="134" name="Google Shape;134;p30"/>
-          <p:cNvSpPr txBox="1"/>
-          <p:nvPr/>
+          <p:cNvSpPr/>
+          <p:nvPr>
+            <p:ph type="title"/>
+          </p:nvPr>
         </p:nvSpPr>
         <p:spPr>
           <a:xfrm>
@@ -27203,8 +27312,10 @@
       <p:sp>
         <p:nvSpPr>
           <p:cNvPr id="151" name="Google Shape;151;p31"/>
-          <p:cNvSpPr txBox="1"/>
-          <p:nvPr/>
+          <p:cNvSpPr/>
+          <p:nvPr>
+            <p:ph type="title"/>
+          </p:nvPr>
         </p:nvSpPr>
         <p:spPr>
           <a:xfrm>
